--- a/Song Template 4.pptx
+++ b/Song Template 4.pptx
@@ -3372,7 +3372,7 @@
           <a:p>
             <a:pPr algn="l"/>
             <a:r>
-              <a:rPr lang="en-US" sz="2800" b="1">
+              <a:rPr lang="en-US" altLang="en-US" sz="2800" b="1">
                 <a:solidFill>
                   <a:schemeClr val="accent1">
                     <a:lumMod val="20000"/>
@@ -3382,9 +3382,9 @@
                 <a:latin typeface="Arial Bold" panose="020B0704020202020204" charset="0"/>
                 <a:cs typeface="Arial Bold" panose="020B0704020202020204" charset="0"/>
               </a:rPr>
-              <a:t>[ TITLE ]</a:t>
-            </a:r>
-            <a:endParaRPr lang="en-US" sz="2800" b="1">
+              <a:t>{{TITLE}}</a:t>
+            </a:r>
+            <a:endParaRPr lang="en-US" altLang="en-US" sz="2800" b="1">
               <a:solidFill>
                 <a:schemeClr val="accent1">
                   <a:lumMod val="20000"/>
@@ -3420,13 +3420,13 @@
               <a:buNone/>
             </a:pPr>
             <a:r>
-              <a:rPr lang="en-US">
+              <a:rPr lang="en-US" altLang="en-US">
                 <a:latin typeface="Arial Regular" panose="020B0704020202020204" charset="0"/>
                 <a:cs typeface="Arial Regular" panose="020B0704020202020204" charset="0"/>
               </a:rPr>
-              <a:t>[LYRICS AND CHORDS]</a:t>
-            </a:r>
-            <a:endParaRPr lang="en-US">
+              <a:t>{{LYRICS}}</a:t>
+            </a:r>
+            <a:endParaRPr lang="en-US" altLang="en-US">
               <a:latin typeface="Arial Regular" panose="020B0704020202020204" charset="0"/>
               <a:cs typeface="Arial Regular" panose="020B0704020202020204" charset="0"/>
             </a:endParaRPr>
@@ -3454,16 +3454,16 @@
           <a:p>
             <a:pPr algn="l"/>
             <a:r>
-              <a:rPr lang="en-US">
+              <a:rPr lang="en-US" altLang="en-US">
                 <a:solidFill>
                   <a:schemeClr val="bg1"/>
                 </a:solidFill>
                 <a:latin typeface="Arial Regular" panose="020B0704020202020204" charset="0"/>
                 <a:cs typeface="Arial Regular" panose="020B0704020202020204" charset="0"/>
               </a:rPr>
-              <a:t>[Copyright Info]</a:t>
-            </a:r>
-            <a:endParaRPr lang="en-US">
+              <a:t>{{COPYRIGHT}}</a:t>
+            </a:r>
+            <a:endParaRPr lang="en-US" altLang="en-US">
               <a:solidFill>
                 <a:schemeClr val="bg1"/>
               </a:solidFill>

--- a/Song Template 4.pptx
+++ b/Song Template 4.pptx
@@ -597,7 +597,15 @@
             <p:ph type="dt" sz="half" idx="10"/>
           </p:nvPr>
         </p:nvSpPr>
-        <p:spPr/>
+        <p:spPr>
+          <a:xfrm>
+            <a:off x="838200" y="6356350"/>
+            <a:ext cx="2743200" cy="365125"/>
+          </a:xfrm>
+          <a:prstGeom prst="rect">
+            <a:avLst/>
+          </a:prstGeom>
+        </p:spPr>
         <p:txBody>
           <a:bodyPr/>
           <a:lstStyle/>
@@ -769,7 +777,15 @@
             <p:ph type="dt" sz="half" idx="10"/>
           </p:nvPr>
         </p:nvSpPr>
-        <p:spPr/>
+        <p:spPr>
+          <a:xfrm>
+            <a:off x="838200" y="6356350"/>
+            <a:ext cx="2743200" cy="365125"/>
+          </a:xfrm>
+          <a:prstGeom prst="rect">
+            <a:avLst/>
+          </a:prstGeom>
+        </p:spPr>
         <p:txBody>
           <a:bodyPr/>
           <a:lstStyle/>
@@ -951,7 +967,15 @@
             <p:ph type="dt" sz="half" idx="10"/>
           </p:nvPr>
         </p:nvSpPr>
-        <p:spPr/>
+        <p:spPr>
+          <a:xfrm>
+            <a:off x="838200" y="6356350"/>
+            <a:ext cx="2743200" cy="365125"/>
+          </a:xfrm>
+          <a:prstGeom prst="rect">
+            <a:avLst/>
+          </a:prstGeom>
+        </p:spPr>
         <p:txBody>
           <a:bodyPr/>
           <a:lstStyle/>
@@ -1020,6 +1044,17 @@
 <file path=ppt/slideLayouts/slideLayout2.xml><?xml version="1.0" encoding="utf-8"?>
 <p:sldLayout xmlns:a="http://schemas.openxmlformats.org/drawingml/2006/main" xmlns:r="http://schemas.openxmlformats.org/officeDocument/2006/relationships" xmlns:p="http://schemas.openxmlformats.org/presentationml/2006/main" type="obj" preserve="1">
   <p:cSld name="Title and Content">
+    <p:bg>
+      <p:bgPr>
+        <a:solidFill>
+          <a:schemeClr val="accent1">
+            <a:lumMod val="40000"/>
+            <a:lumOff val="60000"/>
+          </a:schemeClr>
+        </a:solidFill>
+        <a:effectLst/>
+      </p:bgPr>
+    </p:bg>
     <p:spTree>
       <p:nvGrpSpPr>
         <p:cNvPr id="1" name=""/>
@@ -1044,10 +1079,25 @@
             <p:ph type="title"/>
           </p:nvPr>
         </p:nvSpPr>
-        <p:spPr/>
-        <p:txBody>
-          <a:bodyPr/>
-          <a:lstStyle/>
+        <p:spPr>
+          <a:xfrm>
+            <a:off x="838200" y="5953125"/>
+            <a:ext cx="10515600" cy="483870"/>
+          </a:xfrm>
+        </p:spPr>
+        <p:txBody>
+          <a:bodyPr/>
+          <a:lstStyle>
+            <a:lvl1pPr>
+              <a:defRPr sz="2800">
+                <a:solidFill>
+                  <a:schemeClr val="bg1"/>
+                </a:solidFill>
+                <a:latin typeface="Arial Regular" panose="020B0704020202020204" charset="0"/>
+                <a:cs typeface="Arial Regular" panose="020B0704020202020204" charset="0"/>
+              </a:defRPr>
+            </a:lvl1pPr>
+          </a:lstStyle>
           <a:p>
             <a:r>
               <a:rPr lang="en-US" smtClean="0"/>
@@ -1067,7 +1117,12 @@
             <p:ph idx="1"/>
           </p:nvPr>
         </p:nvSpPr>
-        <p:spPr/>
+        <p:spPr>
+          <a:xfrm>
+            <a:off x="838200" y="536575"/>
+            <a:ext cx="10515600" cy="4942840"/>
+          </a:xfrm>
+        </p:spPr>
         <p:txBody>
           <a:bodyPr/>
           <a:lstStyle/>
@@ -1115,28 +1170,6 @@
       </p:sp>
       <p:sp>
         <p:nvSpPr>
-          <p:cNvPr id="4" name="Date Placeholder 3"/>
-          <p:cNvSpPr>
-            <a:spLocks noGrp="1"/>
-          </p:cNvSpPr>
-          <p:nvPr>
-            <p:ph type="dt" sz="half" idx="10"/>
-          </p:nvPr>
-        </p:nvSpPr>
-        <p:spPr/>
-        <p:txBody>
-          <a:bodyPr/>
-          <a:lstStyle/>
-          <a:p>
-            <a:fld id="{63A1C593-65D0-4073-BCC9-577B9352EA97}" type="datetimeFigureOut">
-              <a:rPr lang="en-US" smtClean="0"/>
-            </a:fld>
-            <a:endParaRPr lang="en-US"/>
-          </a:p>
-        </p:txBody>
-      </p:sp>
-      <p:sp>
-        <p:nvSpPr>
           <p:cNvPr id="5" name="Footer Placeholder 4"/>
           <p:cNvSpPr>
             <a:spLocks noGrp="1"/>
@@ -1145,10 +1178,23 @@
             <p:ph type="ftr" sz="quarter" idx="11"/>
           </p:nvPr>
         </p:nvSpPr>
-        <p:spPr/>
-        <p:txBody>
-          <a:bodyPr/>
-          <a:lstStyle/>
+        <p:spPr>
+          <a:xfrm>
+            <a:off x="837565" y="6356350"/>
+            <a:ext cx="7315835" cy="365125"/>
+          </a:xfrm>
+        </p:spPr>
+        <p:txBody>
+          <a:bodyPr/>
+          <a:lstStyle>
+            <a:lvl1pPr algn="l">
+              <a:defRPr>
+                <a:solidFill>
+                  <a:schemeClr val="bg1"/>
+                </a:solidFill>
+              </a:defRPr>
+            </a:lvl1pPr>
+          </a:lstStyle>
           <a:p>
             <a:r>
               <a:rPr lang="en-US"/>
@@ -1368,7 +1414,15 @@
             <p:ph type="dt" sz="half" idx="10"/>
           </p:nvPr>
         </p:nvSpPr>
-        <p:spPr/>
+        <p:spPr>
+          <a:xfrm>
+            <a:off x="838200" y="6356350"/>
+            <a:ext cx="2743200" cy="365125"/>
+          </a:xfrm>
+          <a:prstGeom prst="rect">
+            <a:avLst/>
+          </a:prstGeom>
+        </p:spPr>
         <p:txBody>
           <a:bodyPr/>
           <a:lstStyle/>
@@ -1606,7 +1660,15 @@
             <p:ph type="dt" sz="half" idx="10"/>
           </p:nvPr>
         </p:nvSpPr>
-        <p:spPr/>
+        <p:spPr>
+          <a:xfrm>
+            <a:off x="838200" y="6356350"/>
+            <a:ext cx="2743200" cy="365125"/>
+          </a:xfrm>
+          <a:prstGeom prst="rect">
+            <a:avLst/>
+          </a:prstGeom>
+        </p:spPr>
         <p:txBody>
           <a:bodyPr/>
           <a:lstStyle/>
@@ -1981,7 +2043,15 @@
             <p:ph type="dt" sz="half" idx="10"/>
           </p:nvPr>
         </p:nvSpPr>
-        <p:spPr/>
+        <p:spPr>
+          <a:xfrm>
+            <a:off x="838200" y="6356350"/>
+            <a:ext cx="2743200" cy="365125"/>
+          </a:xfrm>
+          <a:prstGeom prst="rect">
+            <a:avLst/>
+          </a:prstGeom>
+        </p:spPr>
         <p:txBody>
           <a:bodyPr/>
           <a:lstStyle/>
@@ -2097,7 +2167,15 @@
             <p:ph type="dt" sz="half" idx="10"/>
           </p:nvPr>
         </p:nvSpPr>
-        <p:spPr/>
+        <p:spPr>
+          <a:xfrm>
+            <a:off x="838200" y="6356350"/>
+            <a:ext cx="2743200" cy="365125"/>
+          </a:xfrm>
+          <a:prstGeom prst="rect">
+            <a:avLst/>
+          </a:prstGeom>
+        </p:spPr>
         <p:txBody>
           <a:bodyPr/>
           <a:lstStyle/>
@@ -2190,7 +2268,15 @@
             <p:ph type="dt" sz="half" idx="10"/>
           </p:nvPr>
         </p:nvSpPr>
-        <p:spPr/>
+        <p:spPr>
+          <a:xfrm>
+            <a:off x="838200" y="6356350"/>
+            <a:ext cx="2743200" cy="365125"/>
+          </a:xfrm>
+          <a:prstGeom prst="rect">
+            <a:avLst/>
+          </a:prstGeom>
+        </p:spPr>
         <p:txBody>
           <a:bodyPr/>
           <a:lstStyle/>
@@ -2470,7 +2556,15 @@
             <p:ph type="dt" sz="half" idx="10"/>
           </p:nvPr>
         </p:nvSpPr>
-        <p:spPr/>
+        <p:spPr>
+          <a:xfrm>
+            <a:off x="838200" y="6356350"/>
+            <a:ext cx="2743200" cy="365125"/>
+          </a:xfrm>
+          <a:prstGeom prst="rect">
+            <a:avLst/>
+          </a:prstGeom>
+        </p:spPr>
         <p:txBody>
           <a:bodyPr/>
           <a:lstStyle/>
@@ -2722,7 +2816,15 @@
             <p:ph type="dt" sz="half" idx="10"/>
           </p:nvPr>
         </p:nvSpPr>
-        <p:spPr/>
+        <p:spPr>
+          <a:xfrm>
+            <a:off x="838200" y="6356350"/>
+            <a:ext cx="2743200" cy="365125"/>
+          </a:xfrm>
+          <a:prstGeom prst="rect">
+            <a:avLst/>
+          </a:prstGeom>
+        </p:spPr>
         <p:txBody>
           <a:bodyPr/>
           <a:lstStyle/>
@@ -2792,9 +2894,12 @@
 <p:sldMaster xmlns:a="http://schemas.openxmlformats.org/drawingml/2006/main" xmlns:r="http://schemas.openxmlformats.org/officeDocument/2006/relationships" xmlns:p="http://schemas.openxmlformats.org/presentationml/2006/main">
   <p:cSld>
     <p:bg>
-      <p:bgRef idx="1001">
-        <a:schemeClr val="bg1"/>
-      </p:bgRef>
+      <p:bgPr>
+        <a:solidFill>
+          <a:schemeClr val="accent4"/>
+        </a:solidFill>
+        <a:effectLst/>
+      </p:bgPr>
     </p:bg>
     <p:spTree>
       <p:nvGrpSpPr>
@@ -2822,8 +2927,8 @@
         </p:nvSpPr>
         <p:spPr>
           <a:xfrm>
-            <a:off x="838200" y="365125"/>
-            <a:ext cx="10515600" cy="1325563"/>
+            <a:off x="363855" y="5986145"/>
+            <a:ext cx="10989945" cy="478155"/>
           </a:xfrm>
           <a:prstGeom prst="rect">
             <a:avLst/>
@@ -2855,8 +2960,8 @@
         </p:nvSpPr>
         <p:spPr>
           <a:xfrm>
-            <a:off x="838200" y="1825625"/>
-            <a:ext cx="10515600" cy="4351338"/>
+            <a:off x="838200" y="545465"/>
+            <a:ext cx="10515600" cy="5130800"/>
           </a:xfrm>
           <a:prstGeom prst="rect">
             <a:avLst/>
@@ -2911,18 +3016,18 @@
       </p:sp>
       <p:sp>
         <p:nvSpPr>
-          <p:cNvPr id="4" name="Date Placeholder 3"/>
-          <p:cNvSpPr>
-            <a:spLocks noGrp="1"/>
-          </p:cNvSpPr>
-          <p:nvPr>
-            <p:ph type="dt" sz="half" idx="2"/>
-          </p:nvPr>
-        </p:nvSpPr>
-        <p:spPr>
-          <a:xfrm>
-            <a:off x="838200" y="6356350"/>
-            <a:ext cx="2743200" cy="365125"/>
+          <p:cNvPr id="5" name="Footer Placeholder 4"/>
+          <p:cNvSpPr>
+            <a:spLocks noGrp="1"/>
+          </p:cNvSpPr>
+          <p:nvPr>
+            <p:ph type="ftr" sz="quarter" idx="3"/>
+          </p:nvPr>
+        </p:nvSpPr>
+        <p:spPr>
+          <a:xfrm>
+            <a:off x="363220" y="6356350"/>
+            <a:ext cx="7790180" cy="365125"/>
           </a:xfrm>
           <a:prstGeom prst="rect">
             <a:avLst/>
@@ -2934,49 +3039,7 @@
             <a:lvl1pPr algn="l">
               <a:defRPr sz="1200">
                 <a:solidFill>
-                  <a:schemeClr val="tx1">
-                    <a:tint val="75000"/>
-                  </a:schemeClr>
-                </a:solidFill>
-              </a:defRPr>
-            </a:lvl1pPr>
-          </a:lstStyle>
-          <a:p>
-            <a:fld id="{63A1C593-65D0-4073-BCC9-577B9352EA97}" type="datetimeFigureOut">
-              <a:rPr lang="en-US" smtClean="0"/>
-            </a:fld>
-            <a:endParaRPr lang="en-US"/>
-          </a:p>
-        </p:txBody>
-      </p:sp>
-      <p:sp>
-        <p:nvSpPr>
-          <p:cNvPr id="5" name="Footer Placeholder 4"/>
-          <p:cNvSpPr>
-            <a:spLocks noGrp="1"/>
-          </p:cNvSpPr>
-          <p:nvPr>
-            <p:ph type="ftr" sz="quarter" idx="3"/>
-          </p:nvPr>
-        </p:nvSpPr>
-        <p:spPr>
-          <a:xfrm>
-            <a:off x="4038600" y="6356350"/>
-            <a:ext cx="4114800" cy="365125"/>
-          </a:xfrm>
-          <a:prstGeom prst="rect">
-            <a:avLst/>
-          </a:prstGeom>
-        </p:spPr>
-        <p:txBody>
-          <a:bodyPr vert="horz" lIns="91440" tIns="45720" rIns="91440" bIns="45720" rtlCol="0" anchor="ctr"/>
-          <a:lstStyle>
-            <a:lvl1pPr algn="ctr">
-              <a:defRPr sz="1200">
-                <a:solidFill>
-                  <a:schemeClr val="tx1">
-                    <a:tint val="75000"/>
-                  </a:schemeClr>
+                  <a:schemeClr val="bg1"/>
                 </a:solidFill>
               </a:defRPr>
             </a:lvl1pPr>
@@ -3057,13 +3120,13 @@
           <a:spcPct val="0"/>
         </a:spcBef>
         <a:buNone/>
-        <a:defRPr sz="4400" kern="1200">
+        <a:defRPr sz="2800" kern="1200">
           <a:solidFill>
-            <a:schemeClr val="tx1"/>
+            <a:schemeClr val="bg1"/>
           </a:solidFill>
-          <a:latin typeface="+mj-lt"/>
+          <a:latin typeface="Arial Regular" panose="020B0704020202020204" charset="0"/>
           <a:ea typeface="+mj-ea"/>
-          <a:cs typeface="+mj-cs"/>
+          <a:cs typeface="Arial Regular" panose="020B0704020202020204" charset="0"/>
         </a:defRPr>
       </a:lvl1pPr>
     </p:titleStyle>

--- a/Song Template 4.pptx
+++ b/Song Template 4.pptx
@@ -8,7 +8,7 @@
     <p:notesMasterId r:id="rId4"/>
   </p:notesMasterIdLst>
   <p:sldIdLst>
-    <p:sldId id="5001" r:id="rId3"/>
+    <p:sldId id="5002" r:id="rId3"/>
   </p:sldIdLst>
   <p:sldSz cx="12192000" cy="6858000"/>
   <p:notesSz cx="6858000" cy="9144000"/>
@@ -115,7 +115,7 @@
             <a:srgbClr val="A4A3A4"/>
           </p15:clr>
         </p15:guide>
-        <p15:guide id="2" pos="3842" userDrawn="1">
+        <p15:guide id="2" pos="3840" userDrawn="1">
           <p15:clr>
             <a:srgbClr val="A4A3A4"/>
           </p15:clr>
@@ -1069,6 +1069,30 @@
           <a:chExt cx="0" cy="0"/>
         </a:xfrm>
       </p:grpSpPr>
+      <p:pic>
+        <p:nvPicPr>
+          <p:cNvPr id="4" name="Picture 3" descr="Song Template 4"/>
+          <p:cNvPicPr>
+            <a:picLocks noChangeAspect="1"/>
+          </p:cNvPicPr>
+          <p:nvPr userDrawn="1"/>
+        </p:nvPicPr>
+        <p:blipFill>
+          <a:blip r:embed="rId2"/>
+          <a:stretch>
+            <a:fillRect/>
+          </a:stretch>
+        </p:blipFill>
+        <p:spPr>
+          <a:xfrm>
+            <a:off x="0" y="0"/>
+            <a:ext cx="12192000" cy="6858000"/>
+          </a:xfrm>
+          <a:prstGeom prst="rect">
+            <a:avLst/>
+          </a:prstGeom>
+        </p:spPr>
+      </p:pic>
       <p:sp>
         <p:nvSpPr>
           <p:cNvPr id="2" name="Title 1"/>
@@ -1081,7 +1105,7 @@
         </p:nvSpPr>
         <p:spPr>
           <a:xfrm>
-            <a:off x="838200" y="5953125"/>
+            <a:off x="587375" y="5953125"/>
             <a:ext cx="10515600" cy="483870"/>
           </a:xfrm>
         </p:spPr>
@@ -1180,7 +1204,7 @@
         </p:nvSpPr>
         <p:spPr>
           <a:xfrm>
-            <a:off x="837565" y="6356350"/>
+            <a:off x="586740" y="6356350"/>
             <a:ext cx="7315835" cy="365125"/>
           </a:xfrm>
         </p:spPr>
@@ -3416,7 +3440,7 @@
       <p:grpSpPr/>
       <p:sp>
         <p:nvSpPr>
-          <p:cNvPr id="3" name="Title 2"/>
+          <p:cNvPr id="2" name="Title 1"/>
           <p:cNvSpPr>
             <a:spLocks noGrp="1"/>
           </p:cNvSpPr>
@@ -3424,45 +3448,23 @@
             <p:ph type="title"/>
           </p:nvPr>
         </p:nvSpPr>
-        <p:spPr>
-          <a:xfrm>
-            <a:off x="515620" y="5917565"/>
-            <a:ext cx="11676380" cy="606425"/>
-          </a:xfrm>
-        </p:spPr>
-        <p:txBody>
-          <a:bodyPr/>
-          <a:p>
-            <a:pPr algn="l"/>
-            <a:r>
-              <a:rPr lang="en-US" altLang="en-US" sz="2800" b="1">
-                <a:solidFill>
-                  <a:schemeClr val="accent1">
-                    <a:lumMod val="20000"/>
-                    <a:lumOff val="80000"/>
-                  </a:schemeClr>
-                </a:solidFill>
-                <a:latin typeface="Arial Bold" panose="020B0704020202020204" charset="0"/>
-                <a:cs typeface="Arial Bold" panose="020B0704020202020204" charset="0"/>
-              </a:rPr>
-              <a:t>{{TITLE}}</a:t>
-            </a:r>
-            <a:endParaRPr lang="en-US" altLang="en-US" sz="2800" b="1">
-              <a:solidFill>
-                <a:schemeClr val="accent1">
-                  <a:lumMod val="20000"/>
-                  <a:lumOff val="80000"/>
-                </a:schemeClr>
-              </a:solidFill>
-              <a:latin typeface="Arial Bold" panose="020B0704020202020204" charset="0"/>
-              <a:cs typeface="Arial Bold" panose="020B0704020202020204" charset="0"/>
-            </a:endParaRPr>
-          </a:p>
-        </p:txBody>
-      </p:sp>
-      <p:sp>
-        <p:nvSpPr>
-          <p:cNvPr id="4" name="Content Placeholder 3"/>
+        <p:spPr/>
+        <p:txBody>
+          <a:bodyPr>
+            <a:normAutofit fontScale="90000"/>
+          </a:bodyPr>
+          <a:p>
+            <a:r>
+              <a:rPr lang="en-US"/>
+              <a:t>{{Title}}</a:t>
+            </a:r>
+            <a:endParaRPr lang="en-US"/>
+          </a:p>
+        </p:txBody>
+      </p:sp>
+      <p:sp>
+        <p:nvSpPr>
+          <p:cNvPr id="6" name="Content Placeholder 5"/>
           <p:cNvSpPr>
             <a:spLocks noGrp="1"/>
           </p:cNvSpPr>
@@ -3470,35 +3472,24 @@
             <p:ph idx="1"/>
           </p:nvPr>
         </p:nvSpPr>
-        <p:spPr>
-          <a:xfrm>
-            <a:off x="0" y="365125"/>
-            <a:ext cx="12191365" cy="5080000"/>
-          </a:xfrm>
-        </p:spPr>
-        <p:txBody>
-          <a:bodyPr anchor="ctr" anchorCtr="0"/>
+        <p:spPr/>
+        <p:txBody>
+          <a:bodyPr/>
           <a:p>
             <a:pPr marL="0" indent="0" algn="ctr">
               <a:buNone/>
             </a:pPr>
             <a:r>
-              <a:rPr lang="en-US" altLang="en-US">
-                <a:latin typeface="Arial Regular" panose="020B0704020202020204" charset="0"/>
-                <a:cs typeface="Arial Regular" panose="020B0704020202020204" charset="0"/>
-              </a:rPr>
-              <a:t>{{LYRICS}}</a:t>
-            </a:r>
-            <a:endParaRPr lang="en-US" altLang="en-US">
-              <a:latin typeface="Arial Regular" panose="020B0704020202020204" charset="0"/>
-              <a:cs typeface="Arial Regular" panose="020B0704020202020204" charset="0"/>
-            </a:endParaRPr>
-          </a:p>
-        </p:txBody>
-      </p:sp>
-      <p:sp>
-        <p:nvSpPr>
-          <p:cNvPr id="5" name="Footer Placeholder 4"/>
+              <a:rPr lang="en-US"/>
+              <a:t>{{Lyrics}}</a:t>
+            </a:r>
+            <a:endParaRPr lang="en-US"/>
+          </a:p>
+        </p:txBody>
+      </p:sp>
+      <p:sp>
+        <p:nvSpPr>
+          <p:cNvPr id="7" name="Footer Placeholder 6"/>
           <p:cNvSpPr>
             <a:spLocks noGrp="1"/>
           </p:cNvSpPr>
@@ -3506,33 +3497,15 @@
             <p:ph type="ftr" sz="quarter" idx="11"/>
           </p:nvPr>
         </p:nvSpPr>
-        <p:spPr>
-          <a:xfrm>
-            <a:off x="515620" y="6356350"/>
-            <a:ext cx="11675110" cy="365125"/>
-          </a:xfrm>
-        </p:spPr>
-        <p:txBody>
-          <a:bodyPr/>
-          <a:p>
-            <a:pPr algn="l"/>
-            <a:r>
-              <a:rPr lang="en-US" altLang="en-US">
-                <a:solidFill>
-                  <a:schemeClr val="bg1"/>
-                </a:solidFill>
-                <a:latin typeface="Arial Regular" panose="020B0704020202020204" charset="0"/>
-                <a:cs typeface="Arial Regular" panose="020B0704020202020204" charset="0"/>
-              </a:rPr>
-              <a:t>{{COPYRIGHT}}</a:t>
-            </a:r>
-            <a:endParaRPr lang="en-US" altLang="en-US">
-              <a:solidFill>
-                <a:schemeClr val="bg1"/>
-              </a:solidFill>
-              <a:latin typeface="Arial Regular" panose="020B0704020202020204" charset="0"/>
-              <a:cs typeface="Arial Regular" panose="020B0704020202020204" charset="0"/>
-            </a:endParaRPr>
+        <p:spPr/>
+        <p:txBody>
+          <a:bodyPr/>
+          <a:p>
+            <a:r>
+              <a:rPr lang="en-US"/>
+              <a:t>{{Copyright Info}}</a:t>
+            </a:r>
+            <a:endParaRPr lang="en-US"/>
           </a:p>
         </p:txBody>
       </p:sp>

--- a/Song Template 4.pptx
+++ b/Song Template 4.pptx
@@ -3456,7 +3456,7 @@
           <a:p>
             <a:r>
               <a:rPr lang="en-US"/>
-              <a:t>{{Title}}</a:t>
+              <a:t>[Title]</a:t>
             </a:r>
             <a:endParaRPr lang="en-US"/>
           </a:p>
@@ -3481,7 +3481,7 @@
             </a:pPr>
             <a:r>
               <a:rPr lang="en-US"/>
-              <a:t>{{Lyrics}}</a:t>
+              <a:t>[Lyrics and Chords]</a:t>
             </a:r>
             <a:endParaRPr lang="en-US"/>
           </a:p>
@@ -3503,7 +3503,7 @@
           <a:p>
             <a:r>
               <a:rPr lang="en-US"/>
-              <a:t>{{Copyright Info}}</a:t>
+              <a:t>[Copyright Info]</a:t>
             </a:r>
             <a:endParaRPr lang="en-US"/>
           </a:p>

--- a/Song Template 4.pptx
+++ b/Song Template 4.pptx
@@ -8,7 +8,7 @@
     <p:notesMasterId r:id="rId4"/>
   </p:notesMasterIdLst>
   <p:sldIdLst>
-    <p:sldId id="5002" r:id="rId3"/>
+    <p:sldId id="5001" r:id="rId3"/>
   </p:sldIdLst>
   <p:sldSz cx="12192000" cy="6858000"/>
   <p:notesSz cx="6858000" cy="9144000"/>
@@ -115,7 +115,7 @@
             <a:srgbClr val="A4A3A4"/>
           </p15:clr>
         </p15:guide>
-        <p15:guide id="2" pos="3840" userDrawn="1">
+        <p15:guide id="2" pos="3842" userDrawn="1">
           <p15:clr>
             <a:srgbClr val="A4A3A4"/>
           </p15:clr>
@@ -271,39 +271,39 @@
           <a:p>
             <a:pPr lvl="0"/>
             <a:r>
-              <a:rPr lang="en-US" smtClean="0"/>
+              <a:rPr lang="en-US"/>
               <a:t>Click to edit Master text styles</a:t>
             </a:r>
-            <a:endParaRPr lang="en-US" smtClean="0"/>
+            <a:endParaRPr lang="en-US"/>
           </a:p>
           <a:p>
             <a:pPr lvl="1"/>
             <a:r>
-              <a:rPr lang="en-US" smtClean="0"/>
+              <a:rPr lang="en-US"/>
               <a:t>Second level</a:t>
             </a:r>
-            <a:endParaRPr lang="en-US" smtClean="0"/>
+            <a:endParaRPr lang="en-US"/>
           </a:p>
           <a:p>
             <a:pPr lvl="2"/>
             <a:r>
-              <a:rPr lang="en-US" smtClean="0"/>
+              <a:rPr lang="en-US"/>
               <a:t>Third level</a:t>
             </a:r>
-            <a:endParaRPr lang="en-US" smtClean="0"/>
+            <a:endParaRPr lang="en-US"/>
           </a:p>
           <a:p>
             <a:pPr lvl="3"/>
             <a:r>
-              <a:rPr lang="en-US" smtClean="0"/>
+              <a:rPr lang="en-US"/>
               <a:t>Fourth level</a:t>
             </a:r>
-            <a:endParaRPr lang="en-US" smtClean="0"/>
+            <a:endParaRPr lang="en-US"/>
           </a:p>
           <a:p>
             <a:pPr lvl="4"/>
             <a:r>
-              <a:rPr lang="en-US" smtClean="0"/>
+              <a:rPr lang="en-US"/>
               <a:t>Fifth level</a:t>
             </a:r>
             <a:endParaRPr lang="en-US"/>
@@ -515,7 +515,7 @@
           </a:lstStyle>
           <a:p>
             <a:r>
-              <a:rPr lang="en-US" smtClean="0"/>
+              <a:rPr lang="en-US"/>
               <a:t>Click to edit Master title style</a:t>
             </a:r>
             <a:endParaRPr lang="en-US"/>
@@ -580,7 +580,7 @@
           </a:lstStyle>
           <a:p>
             <a:r>
-              <a:rPr lang="en-US" smtClean="0"/>
+              <a:rPr lang="en-US"/>
               <a:t>Click to edit Master subtitle style</a:t>
             </a:r>
             <a:endParaRPr lang="en-US"/>
@@ -597,15 +597,7 @@
             <p:ph type="dt" sz="half" idx="10"/>
           </p:nvPr>
         </p:nvSpPr>
-        <p:spPr>
-          <a:xfrm>
-            <a:off x="838200" y="6356350"/>
-            <a:ext cx="2743200" cy="365125"/>
-          </a:xfrm>
-          <a:prstGeom prst="rect">
-            <a:avLst/>
-          </a:prstGeom>
-        </p:spPr>
+        <p:spPr/>
         <p:txBody>
           <a:bodyPr/>
           <a:lstStyle/>
@@ -704,7 +696,7 @@
           <a:lstStyle/>
           <a:p>
             <a:r>
-              <a:rPr lang="en-US" smtClean="0"/>
+              <a:rPr lang="en-US"/>
               <a:t>Click to edit Master title style</a:t>
             </a:r>
             <a:endParaRPr lang="en-US"/>
@@ -728,39 +720,39 @@
           <a:p>
             <a:pPr lvl="0"/>
             <a:r>
-              <a:rPr lang="en-US" smtClean="0"/>
+              <a:rPr lang="en-US"/>
               <a:t>Click to edit Master text styles</a:t>
             </a:r>
-            <a:endParaRPr lang="en-US" smtClean="0"/>
+            <a:endParaRPr lang="en-US"/>
           </a:p>
           <a:p>
             <a:pPr lvl="1"/>
             <a:r>
-              <a:rPr lang="en-US" smtClean="0"/>
+              <a:rPr lang="en-US"/>
               <a:t>Second level</a:t>
             </a:r>
-            <a:endParaRPr lang="en-US" smtClean="0"/>
+            <a:endParaRPr lang="en-US"/>
           </a:p>
           <a:p>
             <a:pPr lvl="2"/>
             <a:r>
-              <a:rPr lang="en-US" smtClean="0"/>
+              <a:rPr lang="en-US"/>
               <a:t>Third level</a:t>
             </a:r>
-            <a:endParaRPr lang="en-US" smtClean="0"/>
+            <a:endParaRPr lang="en-US"/>
           </a:p>
           <a:p>
             <a:pPr lvl="3"/>
             <a:r>
-              <a:rPr lang="en-US" smtClean="0"/>
+              <a:rPr lang="en-US"/>
               <a:t>Fourth level</a:t>
             </a:r>
-            <a:endParaRPr lang="en-US" smtClean="0"/>
+            <a:endParaRPr lang="en-US"/>
           </a:p>
           <a:p>
             <a:pPr lvl="4"/>
             <a:r>
-              <a:rPr lang="en-US" smtClean="0"/>
+              <a:rPr lang="en-US"/>
               <a:t>Fifth level</a:t>
             </a:r>
             <a:endParaRPr lang="en-US"/>
@@ -777,15 +769,7 @@
             <p:ph type="dt" sz="half" idx="10"/>
           </p:nvPr>
         </p:nvSpPr>
-        <p:spPr>
-          <a:xfrm>
-            <a:off x="838200" y="6356350"/>
-            <a:ext cx="2743200" cy="365125"/>
-          </a:xfrm>
-          <a:prstGeom prst="rect">
-            <a:avLst/>
-          </a:prstGeom>
-        </p:spPr>
+        <p:spPr/>
         <p:txBody>
           <a:bodyPr/>
           <a:lstStyle/>
@@ -889,7 +873,7 @@
           <a:lstStyle/>
           <a:p>
             <a:r>
-              <a:rPr lang="en-US" smtClean="0"/>
+              <a:rPr lang="en-US"/>
               <a:t>Click to edit Master title style</a:t>
             </a:r>
             <a:endParaRPr lang="en-US"/>
@@ -918,39 +902,39 @@
           <a:p>
             <a:pPr lvl="0"/>
             <a:r>
-              <a:rPr lang="en-US" smtClean="0"/>
+              <a:rPr lang="en-US"/>
               <a:t>Click to edit Master text styles</a:t>
             </a:r>
-            <a:endParaRPr lang="en-US" smtClean="0"/>
+            <a:endParaRPr lang="en-US"/>
           </a:p>
           <a:p>
             <a:pPr lvl="1"/>
             <a:r>
-              <a:rPr lang="en-US" smtClean="0"/>
+              <a:rPr lang="en-US"/>
               <a:t>Second level</a:t>
             </a:r>
-            <a:endParaRPr lang="en-US" smtClean="0"/>
+            <a:endParaRPr lang="en-US"/>
           </a:p>
           <a:p>
             <a:pPr lvl="2"/>
             <a:r>
-              <a:rPr lang="en-US" smtClean="0"/>
+              <a:rPr lang="en-US"/>
               <a:t>Third level</a:t>
             </a:r>
-            <a:endParaRPr lang="en-US" smtClean="0"/>
+            <a:endParaRPr lang="en-US"/>
           </a:p>
           <a:p>
             <a:pPr lvl="3"/>
             <a:r>
-              <a:rPr lang="en-US" smtClean="0"/>
+              <a:rPr lang="en-US"/>
               <a:t>Fourth level</a:t>
             </a:r>
-            <a:endParaRPr lang="en-US" smtClean="0"/>
+            <a:endParaRPr lang="en-US"/>
           </a:p>
           <a:p>
             <a:pPr lvl="4"/>
             <a:r>
-              <a:rPr lang="en-US" smtClean="0"/>
+              <a:rPr lang="en-US"/>
               <a:t>Fifth level</a:t>
             </a:r>
             <a:endParaRPr lang="en-US"/>
@@ -967,15 +951,7 @@
             <p:ph type="dt" sz="half" idx="10"/>
           </p:nvPr>
         </p:nvSpPr>
-        <p:spPr>
-          <a:xfrm>
-            <a:off x="838200" y="6356350"/>
-            <a:ext cx="2743200" cy="365125"/>
-          </a:xfrm>
-          <a:prstGeom prst="rect">
-            <a:avLst/>
-          </a:prstGeom>
-        </p:spPr>
+        <p:spPr/>
         <p:txBody>
           <a:bodyPr/>
           <a:lstStyle/>
@@ -1044,17 +1020,6 @@
 <file path=ppt/slideLayouts/slideLayout2.xml><?xml version="1.0" encoding="utf-8"?>
 <p:sldLayout xmlns:a="http://schemas.openxmlformats.org/drawingml/2006/main" xmlns:r="http://schemas.openxmlformats.org/officeDocument/2006/relationships" xmlns:p="http://schemas.openxmlformats.org/presentationml/2006/main" type="obj" preserve="1">
   <p:cSld name="Title and Content">
-    <p:bg>
-      <p:bgPr>
-        <a:solidFill>
-          <a:schemeClr val="accent1">
-            <a:lumMod val="40000"/>
-            <a:lumOff val="60000"/>
-          </a:schemeClr>
-        </a:solidFill>
-        <a:effectLst/>
-      </p:bgPr>
-    </p:bg>
     <p:spTree>
       <p:nvGrpSpPr>
         <p:cNvPr id="1" name=""/>
@@ -1069,30 +1034,6 @@
           <a:chExt cx="0" cy="0"/>
         </a:xfrm>
       </p:grpSpPr>
-      <p:pic>
-        <p:nvPicPr>
-          <p:cNvPr id="4" name="Picture 3" descr="Song Template 4"/>
-          <p:cNvPicPr>
-            <a:picLocks noChangeAspect="1"/>
-          </p:cNvPicPr>
-          <p:nvPr userDrawn="1"/>
-        </p:nvPicPr>
-        <p:blipFill>
-          <a:blip r:embed="rId2"/>
-          <a:stretch>
-            <a:fillRect/>
-          </a:stretch>
-        </p:blipFill>
-        <p:spPr>
-          <a:xfrm>
-            <a:off x="0" y="0"/>
-            <a:ext cx="12192000" cy="6858000"/>
-          </a:xfrm>
-          <a:prstGeom prst="rect">
-            <a:avLst/>
-          </a:prstGeom>
-        </p:spPr>
-      </p:pic>
       <p:sp>
         <p:nvSpPr>
           <p:cNvPr id="2" name="Title 1"/>
@@ -1103,91 +1044,93 @@
             <p:ph type="title"/>
           </p:nvPr>
         </p:nvSpPr>
-        <p:spPr>
-          <a:xfrm>
-            <a:off x="587375" y="5953125"/>
-            <a:ext cx="10515600" cy="483870"/>
-          </a:xfrm>
-        </p:spPr>
-        <p:txBody>
-          <a:bodyPr/>
-          <a:lstStyle>
-            <a:lvl1pPr>
-              <a:defRPr sz="2800">
-                <a:solidFill>
-                  <a:schemeClr val="bg1"/>
-                </a:solidFill>
-                <a:latin typeface="Arial Regular" panose="020B0704020202020204" charset="0"/>
-                <a:cs typeface="Arial Regular" panose="020B0704020202020204" charset="0"/>
-              </a:defRPr>
-            </a:lvl1pPr>
-          </a:lstStyle>
-          <a:p>
-            <a:r>
+        <p:spPr/>
+        <p:txBody>
+          <a:bodyPr/>
+          <a:lstStyle/>
+          <a:p>
+            <a:r>
+              <a:rPr lang="en-US"/>
+              <a:t>Click to edit Master title style</a:t>
+            </a:r>
+            <a:endParaRPr lang="en-US"/>
+          </a:p>
+        </p:txBody>
+      </p:sp>
+      <p:sp>
+        <p:nvSpPr>
+          <p:cNvPr id="3" name="Content Placeholder 2"/>
+          <p:cNvSpPr>
+            <a:spLocks noGrp="1"/>
+          </p:cNvSpPr>
+          <p:nvPr>
+            <p:ph idx="1"/>
+          </p:nvPr>
+        </p:nvSpPr>
+        <p:spPr/>
+        <p:txBody>
+          <a:bodyPr/>
+          <a:lstStyle/>
+          <a:p>
+            <a:pPr lvl="0"/>
+            <a:r>
+              <a:rPr lang="en-US"/>
+              <a:t>Click to edit Master text styles</a:t>
+            </a:r>
+            <a:endParaRPr lang="en-US"/>
+          </a:p>
+          <a:p>
+            <a:pPr lvl="1"/>
+            <a:r>
+              <a:rPr lang="en-US"/>
+              <a:t>Second level</a:t>
+            </a:r>
+            <a:endParaRPr lang="en-US"/>
+          </a:p>
+          <a:p>
+            <a:pPr lvl="2"/>
+            <a:r>
+              <a:rPr lang="en-US"/>
+              <a:t>Third level</a:t>
+            </a:r>
+            <a:endParaRPr lang="en-US"/>
+          </a:p>
+          <a:p>
+            <a:pPr lvl="3"/>
+            <a:r>
+              <a:rPr lang="en-US"/>
+              <a:t>Fourth level</a:t>
+            </a:r>
+            <a:endParaRPr lang="en-US"/>
+          </a:p>
+          <a:p>
+            <a:pPr lvl="4"/>
+            <a:r>
+              <a:rPr lang="en-US"/>
+              <a:t>Fifth level</a:t>
+            </a:r>
+            <a:endParaRPr lang="en-US"/>
+          </a:p>
+        </p:txBody>
+      </p:sp>
+      <p:sp>
+        <p:nvSpPr>
+          <p:cNvPr id="4" name="Date Placeholder 3"/>
+          <p:cNvSpPr>
+            <a:spLocks noGrp="1"/>
+          </p:cNvSpPr>
+          <p:nvPr>
+            <p:ph type="dt" sz="half" idx="10"/>
+          </p:nvPr>
+        </p:nvSpPr>
+        <p:spPr/>
+        <p:txBody>
+          <a:bodyPr/>
+          <a:lstStyle/>
+          <a:p>
+            <a:fld id="{63A1C593-65D0-4073-BCC9-577B9352EA97}" type="datetimeFigureOut">
               <a:rPr lang="en-US" smtClean="0"/>
-              <a:t>Click to edit Master title style</a:t>
-            </a:r>
-            <a:endParaRPr lang="en-US"/>
-          </a:p>
-        </p:txBody>
-      </p:sp>
-      <p:sp>
-        <p:nvSpPr>
-          <p:cNvPr id="3" name="Content Placeholder 2"/>
-          <p:cNvSpPr>
-            <a:spLocks noGrp="1"/>
-          </p:cNvSpPr>
-          <p:nvPr>
-            <p:ph idx="1"/>
-          </p:nvPr>
-        </p:nvSpPr>
-        <p:spPr>
-          <a:xfrm>
-            <a:off x="838200" y="536575"/>
-            <a:ext cx="10515600" cy="4942840"/>
-          </a:xfrm>
-        </p:spPr>
-        <p:txBody>
-          <a:bodyPr/>
-          <a:lstStyle/>
-          <a:p>
-            <a:pPr lvl="0"/>
-            <a:r>
-              <a:rPr lang="en-US" smtClean="0"/>
-              <a:t>Click to edit Master text styles</a:t>
-            </a:r>
-            <a:endParaRPr lang="en-US" smtClean="0"/>
-          </a:p>
-          <a:p>
-            <a:pPr lvl="1"/>
-            <a:r>
-              <a:rPr lang="en-US" smtClean="0"/>
-              <a:t>Second level</a:t>
-            </a:r>
-            <a:endParaRPr lang="en-US" smtClean="0"/>
-          </a:p>
-          <a:p>
-            <a:pPr lvl="2"/>
-            <a:r>
-              <a:rPr lang="en-US" smtClean="0"/>
-              <a:t>Third level</a:t>
-            </a:r>
-            <a:endParaRPr lang="en-US" smtClean="0"/>
-          </a:p>
-          <a:p>
-            <a:pPr lvl="3"/>
-            <a:r>
-              <a:rPr lang="en-US" smtClean="0"/>
-              <a:t>Fourth level</a:t>
-            </a:r>
-            <a:endParaRPr lang="en-US" smtClean="0"/>
-          </a:p>
-          <a:p>
-            <a:pPr lvl="4"/>
-            <a:r>
-              <a:rPr lang="en-US" smtClean="0"/>
-              <a:t>Fifth level</a:t>
-            </a:r>
+            </a:fld>
             <a:endParaRPr lang="en-US"/>
           </a:p>
         </p:txBody>
@@ -1202,23 +1145,10 @@
             <p:ph type="ftr" sz="quarter" idx="11"/>
           </p:nvPr>
         </p:nvSpPr>
-        <p:spPr>
-          <a:xfrm>
-            <a:off x="586740" y="6356350"/>
-            <a:ext cx="7315835" cy="365125"/>
-          </a:xfrm>
-        </p:spPr>
-        <p:txBody>
-          <a:bodyPr/>
-          <a:lstStyle>
-            <a:lvl1pPr algn="l">
-              <a:defRPr>
-                <a:solidFill>
-                  <a:schemeClr val="bg1"/>
-                </a:solidFill>
-              </a:defRPr>
-            </a:lvl1pPr>
-          </a:lstStyle>
+        <p:spPr/>
+        <p:txBody>
+          <a:bodyPr/>
+          <a:lstStyle/>
           <a:p>
             <a:r>
               <a:rPr lang="en-US"/>
@@ -1301,7 +1231,7 @@
           </a:lstStyle>
           <a:p>
             <a:r>
-              <a:rPr lang="en-US" smtClean="0"/>
+              <a:rPr lang="en-US"/>
               <a:t>Click to edit Master title style</a:t>
             </a:r>
             <a:endParaRPr lang="en-US"/>
@@ -1421,10 +1351,10 @@
           <a:p>
             <a:pPr lvl="0"/>
             <a:r>
-              <a:rPr lang="en-US" smtClean="0"/>
+              <a:rPr lang="en-US"/>
               <a:t>Click to edit Master text styles</a:t>
             </a:r>
-            <a:endParaRPr lang="en-US" smtClean="0"/>
+            <a:endParaRPr lang="en-US"/>
           </a:p>
         </p:txBody>
       </p:sp>
@@ -1438,15 +1368,7 @@
             <p:ph type="dt" sz="half" idx="10"/>
           </p:nvPr>
         </p:nvSpPr>
-        <p:spPr>
-          <a:xfrm>
-            <a:off x="838200" y="6356350"/>
-            <a:ext cx="2743200" cy="365125"/>
-          </a:xfrm>
-          <a:prstGeom prst="rect">
-            <a:avLst/>
-          </a:prstGeom>
-        </p:spPr>
+        <p:spPr/>
         <p:txBody>
           <a:bodyPr/>
           <a:lstStyle/>
@@ -1545,7 +1467,7 @@
           <a:lstStyle/>
           <a:p>
             <a:r>
-              <a:rPr lang="en-US" smtClean="0"/>
+              <a:rPr lang="en-US"/>
               <a:t>Click to edit Master title style</a:t>
             </a:r>
             <a:endParaRPr lang="en-US"/>
@@ -1574,39 +1496,39 @@
           <a:p>
             <a:pPr lvl="0"/>
             <a:r>
-              <a:rPr lang="en-US" smtClean="0"/>
+              <a:rPr lang="en-US"/>
               <a:t>Click to edit Master text styles</a:t>
             </a:r>
-            <a:endParaRPr lang="en-US" smtClean="0"/>
+            <a:endParaRPr lang="en-US"/>
           </a:p>
           <a:p>
             <a:pPr lvl="1"/>
             <a:r>
-              <a:rPr lang="en-US" smtClean="0"/>
+              <a:rPr lang="en-US"/>
               <a:t>Second level</a:t>
             </a:r>
-            <a:endParaRPr lang="en-US" smtClean="0"/>
+            <a:endParaRPr lang="en-US"/>
           </a:p>
           <a:p>
             <a:pPr lvl="2"/>
             <a:r>
-              <a:rPr lang="en-US" smtClean="0"/>
+              <a:rPr lang="en-US"/>
               <a:t>Third level</a:t>
             </a:r>
-            <a:endParaRPr lang="en-US" smtClean="0"/>
+            <a:endParaRPr lang="en-US"/>
           </a:p>
           <a:p>
             <a:pPr lvl="3"/>
             <a:r>
-              <a:rPr lang="en-US" smtClean="0"/>
+              <a:rPr lang="en-US"/>
               <a:t>Fourth level</a:t>
             </a:r>
-            <a:endParaRPr lang="en-US" smtClean="0"/>
+            <a:endParaRPr lang="en-US"/>
           </a:p>
           <a:p>
             <a:pPr lvl="4"/>
             <a:r>
-              <a:rPr lang="en-US" smtClean="0"/>
+              <a:rPr lang="en-US"/>
               <a:t>Fifth level</a:t>
             </a:r>
             <a:endParaRPr lang="en-US"/>
@@ -1635,39 +1557,39 @@
           <a:p>
             <a:pPr lvl="0"/>
             <a:r>
-              <a:rPr lang="en-US" smtClean="0"/>
+              <a:rPr lang="en-US"/>
               <a:t>Click to edit Master text styles</a:t>
             </a:r>
-            <a:endParaRPr lang="en-US" smtClean="0"/>
+            <a:endParaRPr lang="en-US"/>
           </a:p>
           <a:p>
             <a:pPr lvl="1"/>
             <a:r>
-              <a:rPr lang="en-US" smtClean="0"/>
+              <a:rPr lang="en-US"/>
               <a:t>Second level</a:t>
             </a:r>
-            <a:endParaRPr lang="en-US" smtClean="0"/>
+            <a:endParaRPr lang="en-US"/>
           </a:p>
           <a:p>
             <a:pPr lvl="2"/>
             <a:r>
-              <a:rPr lang="en-US" smtClean="0"/>
+              <a:rPr lang="en-US"/>
               <a:t>Third level</a:t>
             </a:r>
-            <a:endParaRPr lang="en-US" smtClean="0"/>
+            <a:endParaRPr lang="en-US"/>
           </a:p>
           <a:p>
             <a:pPr lvl="3"/>
             <a:r>
-              <a:rPr lang="en-US" smtClean="0"/>
+              <a:rPr lang="en-US"/>
               <a:t>Fourth level</a:t>
             </a:r>
-            <a:endParaRPr lang="en-US" smtClean="0"/>
+            <a:endParaRPr lang="en-US"/>
           </a:p>
           <a:p>
             <a:pPr lvl="4"/>
             <a:r>
-              <a:rPr lang="en-US" smtClean="0"/>
+              <a:rPr lang="en-US"/>
               <a:t>Fifth level</a:t>
             </a:r>
             <a:endParaRPr lang="en-US"/>
@@ -1684,15 +1606,7 @@
             <p:ph type="dt" sz="half" idx="10"/>
           </p:nvPr>
         </p:nvSpPr>
-        <p:spPr>
-          <a:xfrm>
-            <a:off x="838200" y="6356350"/>
-            <a:ext cx="2743200" cy="365125"/>
-          </a:xfrm>
-          <a:prstGeom prst="rect">
-            <a:avLst/>
-          </a:prstGeom>
-        </p:spPr>
+        <p:spPr/>
         <p:txBody>
           <a:bodyPr/>
           <a:lstStyle/>
@@ -1796,7 +1710,7 @@
           <a:lstStyle/>
           <a:p>
             <a:r>
-              <a:rPr lang="en-US" smtClean="0"/>
+              <a:rPr lang="en-US"/>
               <a:t>Click to edit Master title style</a:t>
             </a:r>
             <a:endParaRPr lang="en-US"/>
@@ -1862,10 +1776,10 @@
           <a:p>
             <a:pPr lvl="0"/>
             <a:r>
-              <a:rPr lang="en-US" smtClean="0"/>
+              <a:rPr lang="en-US"/>
               <a:t>Click to edit Master text styles</a:t>
             </a:r>
-            <a:endParaRPr lang="en-US" smtClean="0"/>
+            <a:endParaRPr lang="en-US"/>
           </a:p>
         </p:txBody>
       </p:sp>
@@ -1891,39 +1805,39 @@
           <a:p>
             <a:pPr lvl="0"/>
             <a:r>
-              <a:rPr lang="en-US" smtClean="0"/>
+              <a:rPr lang="en-US"/>
               <a:t>Click to edit Master text styles</a:t>
             </a:r>
-            <a:endParaRPr lang="en-US" smtClean="0"/>
+            <a:endParaRPr lang="en-US"/>
           </a:p>
           <a:p>
             <a:pPr lvl="1"/>
             <a:r>
-              <a:rPr lang="en-US" smtClean="0"/>
+              <a:rPr lang="en-US"/>
               <a:t>Second level</a:t>
             </a:r>
-            <a:endParaRPr lang="en-US" smtClean="0"/>
+            <a:endParaRPr lang="en-US"/>
           </a:p>
           <a:p>
             <a:pPr lvl="2"/>
             <a:r>
-              <a:rPr lang="en-US" smtClean="0"/>
+              <a:rPr lang="en-US"/>
               <a:t>Third level</a:t>
             </a:r>
-            <a:endParaRPr lang="en-US" smtClean="0"/>
+            <a:endParaRPr lang="en-US"/>
           </a:p>
           <a:p>
             <a:pPr lvl="3"/>
             <a:r>
-              <a:rPr lang="en-US" smtClean="0"/>
+              <a:rPr lang="en-US"/>
               <a:t>Fourth level</a:t>
             </a:r>
-            <a:endParaRPr lang="en-US" smtClean="0"/>
+            <a:endParaRPr lang="en-US"/>
           </a:p>
           <a:p>
             <a:pPr lvl="4"/>
             <a:r>
-              <a:rPr lang="en-US" smtClean="0"/>
+              <a:rPr lang="en-US"/>
               <a:t>Fifth level</a:t>
             </a:r>
             <a:endParaRPr lang="en-US"/>
@@ -1989,10 +1903,10 @@
           <a:p>
             <a:pPr lvl="0"/>
             <a:r>
-              <a:rPr lang="en-US" smtClean="0"/>
+              <a:rPr lang="en-US"/>
               <a:t>Click to edit Master text styles</a:t>
             </a:r>
-            <a:endParaRPr lang="en-US" smtClean="0"/>
+            <a:endParaRPr lang="en-US"/>
           </a:p>
         </p:txBody>
       </p:sp>
@@ -2018,39 +1932,39 @@
           <a:p>
             <a:pPr lvl="0"/>
             <a:r>
-              <a:rPr lang="en-US" smtClean="0"/>
+              <a:rPr lang="en-US"/>
               <a:t>Click to edit Master text styles</a:t>
             </a:r>
-            <a:endParaRPr lang="en-US" smtClean="0"/>
+            <a:endParaRPr lang="en-US"/>
           </a:p>
           <a:p>
             <a:pPr lvl="1"/>
             <a:r>
-              <a:rPr lang="en-US" smtClean="0"/>
+              <a:rPr lang="en-US"/>
               <a:t>Second level</a:t>
             </a:r>
-            <a:endParaRPr lang="en-US" smtClean="0"/>
+            <a:endParaRPr lang="en-US"/>
           </a:p>
           <a:p>
             <a:pPr lvl="2"/>
             <a:r>
-              <a:rPr lang="en-US" smtClean="0"/>
+              <a:rPr lang="en-US"/>
               <a:t>Third level</a:t>
             </a:r>
-            <a:endParaRPr lang="en-US" smtClean="0"/>
+            <a:endParaRPr lang="en-US"/>
           </a:p>
           <a:p>
             <a:pPr lvl="3"/>
             <a:r>
-              <a:rPr lang="en-US" smtClean="0"/>
+              <a:rPr lang="en-US"/>
               <a:t>Fourth level</a:t>
             </a:r>
-            <a:endParaRPr lang="en-US" smtClean="0"/>
+            <a:endParaRPr lang="en-US"/>
           </a:p>
           <a:p>
             <a:pPr lvl="4"/>
             <a:r>
-              <a:rPr lang="en-US" smtClean="0"/>
+              <a:rPr lang="en-US"/>
               <a:t>Fifth level</a:t>
             </a:r>
             <a:endParaRPr lang="en-US"/>
@@ -2067,15 +1981,7 @@
             <p:ph type="dt" sz="half" idx="10"/>
           </p:nvPr>
         </p:nvSpPr>
-        <p:spPr>
-          <a:xfrm>
-            <a:off x="838200" y="6356350"/>
-            <a:ext cx="2743200" cy="365125"/>
-          </a:xfrm>
-          <a:prstGeom prst="rect">
-            <a:avLst/>
-          </a:prstGeom>
-        </p:spPr>
+        <p:spPr/>
         <p:txBody>
           <a:bodyPr/>
           <a:lstStyle/>
@@ -2174,7 +2080,7 @@
           <a:lstStyle/>
           <a:p>
             <a:r>
-              <a:rPr lang="en-US" smtClean="0"/>
+              <a:rPr lang="en-US"/>
               <a:t>Click to edit Master title style</a:t>
             </a:r>
             <a:endParaRPr lang="en-US"/>
@@ -2191,15 +2097,7 @@
             <p:ph type="dt" sz="half" idx="10"/>
           </p:nvPr>
         </p:nvSpPr>
-        <p:spPr>
-          <a:xfrm>
-            <a:off x="838200" y="6356350"/>
-            <a:ext cx="2743200" cy="365125"/>
-          </a:xfrm>
-          <a:prstGeom prst="rect">
-            <a:avLst/>
-          </a:prstGeom>
-        </p:spPr>
+        <p:spPr/>
         <p:txBody>
           <a:bodyPr/>
           <a:lstStyle/>
@@ -2292,15 +2190,7 @@
             <p:ph type="dt" sz="half" idx="10"/>
           </p:nvPr>
         </p:nvSpPr>
-        <p:spPr>
-          <a:xfrm>
-            <a:off x="838200" y="6356350"/>
-            <a:ext cx="2743200" cy="365125"/>
-          </a:xfrm>
-          <a:prstGeom prst="rect">
-            <a:avLst/>
-          </a:prstGeom>
-        </p:spPr>
+        <p:spPr/>
         <p:txBody>
           <a:bodyPr/>
           <a:lstStyle/>
@@ -2408,7 +2298,7 @@
           </a:lstStyle>
           <a:p>
             <a:r>
-              <a:rPr lang="en-US" smtClean="0"/>
+              <a:rPr lang="en-US"/>
               <a:t>Click to edit Master title style</a:t>
             </a:r>
             <a:endParaRPr lang="en-US"/>
@@ -2465,39 +2355,39 @@
           <a:p>
             <a:pPr lvl="0"/>
             <a:r>
-              <a:rPr lang="en-US" smtClean="0"/>
+              <a:rPr lang="en-US"/>
               <a:t>Click to edit Master text styles</a:t>
             </a:r>
-            <a:endParaRPr lang="en-US" smtClean="0"/>
+            <a:endParaRPr lang="en-US"/>
           </a:p>
           <a:p>
             <a:pPr lvl="1"/>
             <a:r>
-              <a:rPr lang="en-US" smtClean="0"/>
+              <a:rPr lang="en-US"/>
               <a:t>Second level</a:t>
             </a:r>
-            <a:endParaRPr lang="en-US" smtClean="0"/>
+            <a:endParaRPr lang="en-US"/>
           </a:p>
           <a:p>
             <a:pPr lvl="2"/>
             <a:r>
-              <a:rPr lang="en-US" smtClean="0"/>
+              <a:rPr lang="en-US"/>
               <a:t>Third level</a:t>
             </a:r>
-            <a:endParaRPr lang="en-US" smtClean="0"/>
+            <a:endParaRPr lang="en-US"/>
           </a:p>
           <a:p>
             <a:pPr lvl="3"/>
             <a:r>
-              <a:rPr lang="en-US" smtClean="0"/>
+              <a:rPr lang="en-US"/>
               <a:t>Fourth level</a:t>
             </a:r>
-            <a:endParaRPr lang="en-US" smtClean="0"/>
+            <a:endParaRPr lang="en-US"/>
           </a:p>
           <a:p>
             <a:pPr lvl="4"/>
             <a:r>
-              <a:rPr lang="en-US" smtClean="0"/>
+              <a:rPr lang="en-US"/>
               <a:t>Fifth level</a:t>
             </a:r>
             <a:endParaRPr lang="en-US"/>
@@ -2563,10 +2453,10 @@
           <a:p>
             <a:pPr lvl="0"/>
             <a:r>
-              <a:rPr lang="en-US" smtClean="0"/>
+              <a:rPr lang="en-US"/>
               <a:t>Click to edit Master text styles</a:t>
             </a:r>
-            <a:endParaRPr lang="en-US" smtClean="0"/>
+            <a:endParaRPr lang="en-US"/>
           </a:p>
         </p:txBody>
       </p:sp>
@@ -2580,15 +2470,7 @@
             <p:ph type="dt" sz="half" idx="10"/>
           </p:nvPr>
         </p:nvSpPr>
-        <p:spPr>
-          <a:xfrm>
-            <a:off x="838200" y="6356350"/>
-            <a:ext cx="2743200" cy="365125"/>
-          </a:xfrm>
-          <a:prstGeom prst="rect">
-            <a:avLst/>
-          </a:prstGeom>
-        </p:spPr>
+        <p:spPr/>
         <p:txBody>
           <a:bodyPr/>
           <a:lstStyle/>
@@ -2696,7 +2578,7 @@
           </a:lstStyle>
           <a:p>
             <a:r>
-              <a:rPr lang="en-US" smtClean="0"/>
+              <a:rPr lang="en-US"/>
               <a:t>Click to edit Master title style</a:t>
             </a:r>
             <a:endParaRPr lang="en-US"/>
@@ -2823,10 +2705,10 @@
           <a:p>
             <a:pPr lvl="0"/>
             <a:r>
-              <a:rPr lang="en-US" smtClean="0"/>
+              <a:rPr lang="en-US"/>
               <a:t>Click to edit Master text styles</a:t>
             </a:r>
-            <a:endParaRPr lang="en-US" smtClean="0"/>
+            <a:endParaRPr lang="en-US"/>
           </a:p>
         </p:txBody>
       </p:sp>
@@ -2840,15 +2722,7 @@
             <p:ph type="dt" sz="half" idx="10"/>
           </p:nvPr>
         </p:nvSpPr>
-        <p:spPr>
-          <a:xfrm>
-            <a:off x="838200" y="6356350"/>
-            <a:ext cx="2743200" cy="365125"/>
-          </a:xfrm>
-          <a:prstGeom prst="rect">
-            <a:avLst/>
-          </a:prstGeom>
-        </p:spPr>
+        <p:spPr/>
         <p:txBody>
           <a:bodyPr/>
           <a:lstStyle/>
@@ -2918,12 +2792,9 @@
 <p:sldMaster xmlns:a="http://schemas.openxmlformats.org/drawingml/2006/main" xmlns:r="http://schemas.openxmlformats.org/officeDocument/2006/relationships" xmlns:p="http://schemas.openxmlformats.org/presentationml/2006/main">
   <p:cSld>
     <p:bg>
-      <p:bgPr>
-        <a:solidFill>
-          <a:schemeClr val="accent4"/>
-        </a:solidFill>
-        <a:effectLst/>
-      </p:bgPr>
+      <p:bgRef idx="1001">
+        <a:schemeClr val="bg1"/>
+      </p:bgRef>
     </p:bg>
     <p:spTree>
       <p:nvGrpSpPr>
@@ -2951,8 +2822,8 @@
         </p:nvSpPr>
         <p:spPr>
           <a:xfrm>
-            <a:off x="363855" y="5986145"/>
-            <a:ext cx="10989945" cy="478155"/>
+            <a:off x="838200" y="365125"/>
+            <a:ext cx="10515600" cy="1325563"/>
           </a:xfrm>
           <a:prstGeom prst="rect">
             <a:avLst/>
@@ -2965,7 +2836,7 @@
           <a:lstStyle/>
           <a:p>
             <a:r>
-              <a:rPr lang="en-US" smtClean="0"/>
+              <a:rPr lang="en-US"/>
               <a:t>Click to edit Master title style</a:t>
             </a:r>
             <a:endParaRPr lang="en-US"/>
@@ -2984,8 +2855,8 @@
         </p:nvSpPr>
         <p:spPr>
           <a:xfrm>
-            <a:off x="838200" y="545465"/>
-            <a:ext cx="10515600" cy="5130800"/>
+            <a:off x="838200" y="1825625"/>
+            <a:ext cx="10515600" cy="4351338"/>
           </a:xfrm>
           <a:prstGeom prst="rect">
             <a:avLst/>
@@ -2999,39 +2870,39 @@
           <a:p>
             <a:pPr lvl="0"/>
             <a:r>
-              <a:rPr lang="en-US" smtClean="0"/>
+              <a:rPr lang="en-US"/>
               <a:t>Click to edit Master text styles</a:t>
             </a:r>
-            <a:endParaRPr lang="en-US" smtClean="0"/>
+            <a:endParaRPr lang="en-US"/>
           </a:p>
           <a:p>
             <a:pPr lvl="1"/>
             <a:r>
-              <a:rPr lang="en-US" smtClean="0"/>
+              <a:rPr lang="en-US"/>
               <a:t>Second level</a:t>
             </a:r>
-            <a:endParaRPr lang="en-US" smtClean="0"/>
+            <a:endParaRPr lang="en-US"/>
           </a:p>
           <a:p>
             <a:pPr lvl="2"/>
             <a:r>
-              <a:rPr lang="en-US" smtClean="0"/>
+              <a:rPr lang="en-US"/>
               <a:t>Third level</a:t>
             </a:r>
-            <a:endParaRPr lang="en-US" smtClean="0"/>
+            <a:endParaRPr lang="en-US"/>
           </a:p>
           <a:p>
             <a:pPr lvl="3"/>
             <a:r>
-              <a:rPr lang="en-US" smtClean="0"/>
+              <a:rPr lang="en-US"/>
               <a:t>Fourth level</a:t>
             </a:r>
-            <a:endParaRPr lang="en-US" smtClean="0"/>
+            <a:endParaRPr lang="en-US"/>
           </a:p>
           <a:p>
             <a:pPr lvl="4"/>
             <a:r>
-              <a:rPr lang="en-US" smtClean="0"/>
+              <a:rPr lang="en-US"/>
               <a:t>Fifth level</a:t>
             </a:r>
             <a:endParaRPr lang="en-US"/>
@@ -3040,18 +2911,18 @@
       </p:sp>
       <p:sp>
         <p:nvSpPr>
-          <p:cNvPr id="5" name="Footer Placeholder 4"/>
-          <p:cNvSpPr>
-            <a:spLocks noGrp="1"/>
-          </p:cNvSpPr>
-          <p:nvPr>
-            <p:ph type="ftr" sz="quarter" idx="3"/>
+          <p:cNvPr id="4" name="Date Placeholder 3"/>
+          <p:cNvSpPr>
+            <a:spLocks noGrp="1"/>
+          </p:cNvSpPr>
+          <p:nvPr>
+            <p:ph type="dt" sz="half" idx="2"/>
           </p:nvPr>
         </p:nvSpPr>
         <p:spPr>
           <a:xfrm>
-            <a:off x="363220" y="6356350"/>
-            <a:ext cx="7790180" cy="365125"/>
+            <a:off x="838200" y="6356350"/>
+            <a:ext cx="2743200" cy="365125"/>
           </a:xfrm>
           <a:prstGeom prst="rect">
             <a:avLst/>
@@ -3063,7 +2934,49 @@
             <a:lvl1pPr algn="l">
               <a:defRPr sz="1200">
                 <a:solidFill>
-                  <a:schemeClr val="bg1"/>
+                  <a:schemeClr val="tx1">
+                    <a:tint val="75000"/>
+                  </a:schemeClr>
+                </a:solidFill>
+              </a:defRPr>
+            </a:lvl1pPr>
+          </a:lstStyle>
+          <a:p>
+            <a:fld id="{63A1C593-65D0-4073-BCC9-577B9352EA97}" type="datetimeFigureOut">
+              <a:rPr lang="en-US" smtClean="0"/>
+            </a:fld>
+            <a:endParaRPr lang="en-US"/>
+          </a:p>
+        </p:txBody>
+      </p:sp>
+      <p:sp>
+        <p:nvSpPr>
+          <p:cNvPr id="5" name="Footer Placeholder 4"/>
+          <p:cNvSpPr>
+            <a:spLocks noGrp="1"/>
+          </p:cNvSpPr>
+          <p:nvPr>
+            <p:ph type="ftr" sz="quarter" idx="3"/>
+          </p:nvPr>
+        </p:nvSpPr>
+        <p:spPr>
+          <a:xfrm>
+            <a:off x="4038600" y="6356350"/>
+            <a:ext cx="4114800" cy="365125"/>
+          </a:xfrm>
+          <a:prstGeom prst="rect">
+            <a:avLst/>
+          </a:prstGeom>
+        </p:spPr>
+        <p:txBody>
+          <a:bodyPr vert="horz" lIns="91440" tIns="45720" rIns="91440" bIns="45720" rtlCol="0" anchor="ctr"/>
+          <a:lstStyle>
+            <a:lvl1pPr algn="ctr">
+              <a:defRPr sz="1200">
+                <a:solidFill>
+                  <a:schemeClr val="tx1">
+                    <a:tint val="75000"/>
+                  </a:schemeClr>
                 </a:solidFill>
               </a:defRPr>
             </a:lvl1pPr>
@@ -3144,13 +3057,13 @@
           <a:spcPct val="0"/>
         </a:spcBef>
         <a:buNone/>
-        <a:defRPr sz="2800" kern="1200">
+        <a:defRPr sz="4400" kern="1200">
           <a:solidFill>
-            <a:schemeClr val="bg1"/>
+            <a:schemeClr val="tx1"/>
           </a:solidFill>
-          <a:latin typeface="Arial Regular" panose="020B0704020202020204" charset="0"/>
+          <a:latin typeface="+mj-lt"/>
           <a:ea typeface="+mj-ea"/>
-          <a:cs typeface="Arial Regular" panose="020B0704020202020204" charset="0"/>
+          <a:cs typeface="+mj-cs"/>
         </a:defRPr>
       </a:lvl1pPr>
     </p:titleStyle>
@@ -3437,10 +3350,56 @@
         <p:cNvGrpSpPr/>
         <p:nvPr/>
       </p:nvGrpSpPr>
-      <p:grpSpPr/>
-      <p:sp>
-        <p:nvSpPr>
-          <p:cNvPr id="2" name="Title 1"/>
+      <p:grpSpPr>
+        <a:xfrm>
+          <a:off x="0" y="0"/>
+          <a:ext cx="0" cy="0"/>
+          <a:chOff x="0" y="0"/>
+          <a:chExt cx="0" cy="0"/>
+        </a:xfrm>
+      </p:grpSpPr>
+      <p:sp>
+        <p:nvSpPr>
+          <p:cNvPr id="4" name="Content Placeholder 3"/>
+          <p:cNvSpPr>
+            <a:spLocks noGrp="1"/>
+          </p:cNvSpPr>
+          <p:nvPr>
+            <p:ph idx="1"/>
+          </p:nvPr>
+        </p:nvSpPr>
+        <p:spPr>
+          <a:xfrm>
+            <a:off x="838200" y="219075"/>
+            <a:ext cx="10515600" cy="5697220"/>
+          </a:xfrm>
+        </p:spPr>
+        <p:txBody>
+          <a:bodyPr anchor="ctr"/>
+          <a:lstStyle/>
+          <a:p>
+            <a:pPr marL="0" indent="0" algn="ctr">
+              <a:buNone/>
+            </a:pPr>
+            <a:r>
+              <a:rPr lang="en-US" dirty="0">
+                <a:latin typeface="Courier New Regular" panose="02070609020205020404" charset="0"/>
+                <a:cs typeface="Courier New Regular" panose="02070609020205020404" charset="0"/>
+                <a:sym typeface="+mn-ea"/>
+              </a:rPr>
+              <a:t>[LYRICS AND CHORDS]</a:t>
+            </a:r>
+            <a:endParaRPr lang="en-US" dirty="0">
+              <a:latin typeface="Courier New Regular" panose="02070609020205020404" charset="0"/>
+              <a:cs typeface="Courier New Regular" panose="02070609020205020404" charset="0"/>
+              <a:sym typeface="+mn-ea"/>
+            </a:endParaRPr>
+          </a:p>
+        </p:txBody>
+      </p:sp>
+      <p:sp>
+        <p:nvSpPr>
+          <p:cNvPr id="6" name="Title 5"/>
           <p:cNvSpPr>
             <a:spLocks noGrp="1"/>
           </p:cNvSpPr>
@@ -3448,48 +3407,39 @@
             <p:ph type="title"/>
           </p:nvPr>
         </p:nvSpPr>
-        <p:spPr/>
-        <p:txBody>
-          <a:bodyPr>
-            <a:normAutofit fontScale="90000"/>
-          </a:bodyPr>
-          <a:p>
-            <a:r>
-              <a:rPr lang="en-US"/>
+        <p:spPr>
+          <a:xfrm>
+            <a:off x="588645" y="5981700"/>
+            <a:ext cx="10066020" cy="521970"/>
+          </a:xfrm>
+        </p:spPr>
+        <p:txBody>
+          <a:bodyPr/>
+          <a:lstStyle/>
+          <a:p>
+            <a:r>
+              <a:rPr lang="en-US" sz="2400" dirty="0">
+                <a:solidFill>
+                  <a:schemeClr val="bg1"/>
+                </a:solidFill>
+                <a:latin typeface="Courier New Regular" panose="02070609020205020404" charset="0"/>
+                <a:cs typeface="Courier New Regular" panose="02070609020205020404" charset="0"/>
+              </a:rPr>
               <a:t>[Title]</a:t>
             </a:r>
-            <a:endParaRPr lang="en-US"/>
-          </a:p>
-        </p:txBody>
-      </p:sp>
-      <p:sp>
-        <p:nvSpPr>
-          <p:cNvPr id="6" name="Content Placeholder 5"/>
-          <p:cNvSpPr>
-            <a:spLocks noGrp="1"/>
-          </p:cNvSpPr>
-          <p:nvPr>
-            <p:ph idx="1"/>
-          </p:nvPr>
-        </p:nvSpPr>
-        <p:spPr/>
-        <p:txBody>
-          <a:bodyPr/>
-          <a:p>
-            <a:pPr marL="0" indent="0" algn="ctr">
-              <a:buNone/>
-            </a:pPr>
-            <a:r>
-              <a:rPr lang="en-US"/>
-              <a:t>[Lyrics and Chords]</a:t>
-            </a:r>
-            <a:endParaRPr lang="en-US"/>
-          </a:p>
-        </p:txBody>
-      </p:sp>
-      <p:sp>
-        <p:nvSpPr>
-          <p:cNvPr id="7" name="Footer Placeholder 6"/>
+            <a:endParaRPr lang="en-US" sz="2400" dirty="0">
+              <a:solidFill>
+                <a:schemeClr val="bg1"/>
+              </a:solidFill>
+              <a:latin typeface="Courier New Regular" panose="02070609020205020404" charset="0"/>
+              <a:cs typeface="Courier New Regular" panose="02070609020205020404" charset="0"/>
+            </a:endParaRPr>
+          </a:p>
+        </p:txBody>
+      </p:sp>
+      <p:sp>
+        <p:nvSpPr>
+          <p:cNvPr id="9" name="Footer Placeholder 8"/>
           <p:cNvSpPr>
             <a:spLocks noGrp="1"/>
           </p:cNvSpPr>
@@ -3497,24 +3447,55 @@
             <p:ph type="ftr" sz="quarter" idx="11"/>
           </p:nvPr>
         </p:nvSpPr>
-        <p:spPr/>
-        <p:txBody>
-          <a:bodyPr/>
-          <a:p>
-            <a:r>
-              <a:rPr lang="en-US"/>
+        <p:spPr>
+          <a:xfrm>
+            <a:off x="588728" y="6308780"/>
+            <a:ext cx="4114800" cy="365125"/>
+          </a:xfrm>
+        </p:spPr>
+        <p:txBody>
+          <a:bodyPr/>
+          <a:lstStyle/>
+          <a:p>
+            <a:pPr algn="l"/>
+            <a:r>
+              <a:rPr lang="en-US" dirty="0">
+                <a:solidFill>
+                  <a:schemeClr val="bg1"/>
+                </a:solidFill>
+                <a:latin typeface="Courier New Regular" panose="02070609020205020404" charset="0"/>
+                <a:cs typeface="Courier New Regular" panose="02070609020205020404" charset="0"/>
+              </a:rPr>
               <a:t>[Copyright Info]</a:t>
             </a:r>
-            <a:endParaRPr lang="en-US"/>
+            <a:endParaRPr lang="en-US" dirty="0">
+              <a:solidFill>
+                <a:schemeClr val="bg1"/>
+              </a:solidFill>
+              <a:latin typeface="Courier New Regular" panose="02070609020205020404" charset="0"/>
+              <a:cs typeface="Courier New Regular" panose="02070609020205020404" charset="0"/>
+            </a:endParaRPr>
           </a:p>
         </p:txBody>
       </p:sp>
     </p:spTree>
+    <p:custDataLst>
+      <p:tags r:id="rId2"/>
+    </p:custDataLst>
   </p:cSld>
   <p:clrMapOvr>
     <a:masterClrMapping/>
   </p:clrMapOvr>
 </p:sld>
+</file>
+
+<file path=ppt/tags/tag1.xml><?xml version="1.0" encoding="utf-8"?>
+<p:tagLst xmlns:p="http://schemas.openxmlformats.org/presentationml/2006/main">
+  <p:tag name="KSO_WM_SLIDE_TYPE" val="text"/>
+  <p:tag name="KSO_WM_BEAUTIFY_FLAG" val="#wm#"/>
+  <p:tag name="KSO_WM_SLIDE_THEME_ID" val="3312678"/>
+  <p:tag name="KSO_WM_SLIDE_THEME_NAME" val="Red Minimalist"/>
+</p:tagLst>
 </file>
 
 <file path=ppt/theme/theme1.xml><?xml version="1.0" encoding="utf-8"?>

--- a/Song Template 4.pptx
+++ b/Song Template 4.pptx
@@ -3375,7 +3375,7 @@
           </a:xfrm>
         </p:spPr>
         <p:txBody>
-          <a:bodyPr anchor="ctr"/>
+          <a:bodyPr anchor="t" anchorCtr="0"/>
           <a:lstStyle/>
           <a:p>
             <a:pPr marL="0" indent="0" algn="ctr">
@@ -3383,15 +3383,15 @@
             </a:pPr>
             <a:r>
               <a:rPr lang="en-US" dirty="0">
-                <a:latin typeface="Courier New Regular" panose="02070609020205020404" charset="0"/>
-                <a:cs typeface="Courier New Regular" panose="02070609020205020404" charset="0"/>
+                <a:latin typeface="Times New Roman Regular" panose="02020603050405020304" charset="0"/>
+                <a:cs typeface="Times New Roman Regular" panose="02020603050405020304" charset="0"/>
                 <a:sym typeface="+mn-ea"/>
               </a:rPr>
               <a:t>[LYRICS AND CHORDS]</a:t>
             </a:r>
             <a:endParaRPr lang="en-US" dirty="0">
-              <a:latin typeface="Courier New Regular" panose="02070609020205020404" charset="0"/>
-              <a:cs typeface="Courier New Regular" panose="02070609020205020404" charset="0"/>
+              <a:latin typeface="Times New Roman Regular" panose="02020603050405020304" charset="0"/>
+              <a:cs typeface="Times New Roman Regular" panose="02020603050405020304" charset="0"/>
               <a:sym typeface="+mn-ea"/>
             </a:endParaRPr>
           </a:p>
@@ -3422,8 +3422,8 @@
                 <a:solidFill>
                   <a:schemeClr val="bg1"/>
                 </a:solidFill>
-                <a:latin typeface="Courier New Regular" panose="02070609020205020404" charset="0"/>
-                <a:cs typeface="Courier New Regular" panose="02070609020205020404" charset="0"/>
+                <a:latin typeface="Times New Roman Regular" panose="02020603050405020304" charset="0"/>
+                <a:cs typeface="Times New Roman Regular" panose="02020603050405020304" charset="0"/>
               </a:rPr>
               <a:t>[Title]</a:t>
             </a:r>
@@ -3431,8 +3431,8 @@
               <a:solidFill>
                 <a:schemeClr val="bg1"/>
               </a:solidFill>
-              <a:latin typeface="Courier New Regular" panose="02070609020205020404" charset="0"/>
-              <a:cs typeface="Courier New Regular" panose="02070609020205020404" charset="0"/>
+              <a:latin typeface="Times New Roman Regular" panose="02020603050405020304" charset="0"/>
+              <a:cs typeface="Times New Roman Regular" panose="02020603050405020304" charset="0"/>
             </a:endParaRPr>
           </a:p>
         </p:txBody>
@@ -3463,8 +3463,8 @@
                 <a:solidFill>
                   <a:schemeClr val="bg1"/>
                 </a:solidFill>
-                <a:latin typeface="Courier New Regular" panose="02070609020205020404" charset="0"/>
-                <a:cs typeface="Courier New Regular" panose="02070609020205020404" charset="0"/>
+                <a:latin typeface="Times New Roman Regular" panose="02020603050405020304" charset="0"/>
+                <a:cs typeface="Times New Roman Regular" panose="02020603050405020304" charset="0"/>
               </a:rPr>
               <a:t>[Copyright Info]</a:t>
             </a:r>
@@ -3472,8 +3472,8 @@
               <a:solidFill>
                 <a:schemeClr val="bg1"/>
               </a:solidFill>
-              <a:latin typeface="Courier New Regular" panose="02070609020205020404" charset="0"/>
-              <a:cs typeface="Courier New Regular" panose="02070609020205020404" charset="0"/>
+              <a:latin typeface="Times New Roman Regular" panose="02020603050405020304" charset="0"/>
+              <a:cs typeface="Times New Roman Regular" panose="02020603050405020304" charset="0"/>
             </a:endParaRPr>
           </a:p>
         </p:txBody>

--- a/Song Template 4.pptx
+++ b/Song Template 4.pptx
@@ -473,6 +473,58 @@
 </p:notesMaster>
 </file>
 
+<file path=ppt/notesSlides/notesSlide1.xml><?xml version="1.0" encoding="utf-8"?>
+<p:notes xmlns:a="http://schemas.openxmlformats.org/drawingml/2006/main" xmlns:r="http://schemas.openxmlformats.org/officeDocument/2006/relationships" xmlns:p="http://schemas.openxmlformats.org/presentationml/2006/main">
+  <p:cSld>
+    <p:spTree>
+      <p:nvGrpSpPr>
+        <p:cNvPr id="1" name=""/>
+        <p:cNvGrpSpPr/>
+        <p:nvPr/>
+      </p:nvGrpSpPr>
+      <p:grpSpPr/>
+      <p:sp>
+        <p:nvSpPr>
+          <p:cNvPr id="2" name="Slide Image Placeholder 1"/>
+          <p:cNvSpPr>
+            <a:spLocks noGrp="1"/>
+          </p:cNvSpPr>
+          <p:nvPr>
+            <p:ph type="sldImg" idx="2"/>
+          </p:nvPr>
+        </p:nvSpPr>
+        <p:spPr/>
+      </p:sp>
+      <p:sp>
+        <p:nvSpPr>
+          <p:cNvPr id="3" name="Text Placeholder 2"/>
+          <p:cNvSpPr>
+            <a:spLocks noGrp="1"/>
+          </p:cNvSpPr>
+          <p:nvPr>
+            <p:ph type="body" idx="3"/>
+          </p:nvPr>
+        </p:nvSpPr>
+        <p:spPr/>
+        <p:txBody>
+          <a:bodyPr/>
+          <a:p>
+            <a:r>
+              <a:rPr lang="en-US"/>
+              <a:t>[Presenter Note]</a:t>
+            </a:r>
+            <a:endParaRPr lang="en-US"/>
+          </a:p>
+        </p:txBody>
+      </p:sp>
+    </p:spTree>
+  </p:cSld>
+  <p:clrMapOvr>
+    <a:masterClrMapping/>
+  </p:clrMapOvr>
+</p:notes>
+</file>
+
 <file path=ppt/slideLayouts/slideLayout1.xml><?xml version="1.0" encoding="utf-8"?>
 <p:sldLayout xmlns:a="http://schemas.openxmlformats.org/drawingml/2006/main" xmlns:r="http://schemas.openxmlformats.org/officeDocument/2006/relationships" xmlns:p="http://schemas.openxmlformats.org/presentationml/2006/main" type="title" preserve="1">
   <p:cSld name="Title Slide">
@@ -1020,6 +1072,17 @@
 <file path=ppt/slideLayouts/slideLayout2.xml><?xml version="1.0" encoding="utf-8"?>
 <p:sldLayout xmlns:a="http://schemas.openxmlformats.org/drawingml/2006/main" xmlns:r="http://schemas.openxmlformats.org/officeDocument/2006/relationships" xmlns:p="http://schemas.openxmlformats.org/presentationml/2006/main" type="obj" preserve="1">
   <p:cSld name="Title and Content">
+    <p:bg>
+      <p:bgPr>
+        <a:blipFill rotWithShape="1">
+          <a:blip r:embed="rId2"/>
+          <a:stretch>
+            <a:fillRect/>
+          </a:stretch>
+        </a:blipFill>
+        <a:effectLst/>
+      </p:bgPr>
+    </p:bg>
     <p:spTree>
       <p:nvGrpSpPr>
         <p:cNvPr id="1" name=""/>
@@ -1044,10 +1107,27 @@
             <p:ph type="title"/>
           </p:nvPr>
         </p:nvSpPr>
-        <p:spPr/>
-        <p:txBody>
-          <a:bodyPr/>
-          <a:lstStyle/>
+        <p:spPr>
+          <a:xfrm>
+            <a:off x="560070" y="6057265"/>
+            <a:ext cx="10515600" cy="365125"/>
+          </a:xfrm>
+        </p:spPr>
+        <p:txBody>
+          <a:bodyPr>
+            <a:noAutofit/>
+          </a:bodyPr>
+          <a:lstStyle>
+            <a:lvl1pPr>
+              <a:defRPr sz="2800">
+                <a:solidFill>
+                  <a:schemeClr val="bg1"/>
+                </a:solidFill>
+                <a:latin typeface="Times New Roman Regular" panose="02020603050405020304" charset="0"/>
+                <a:cs typeface="Times New Roman Regular" panose="02020603050405020304" charset="0"/>
+              </a:defRPr>
+            </a:lvl1pPr>
+          </a:lstStyle>
           <a:p>
             <a:r>
               <a:rPr lang="en-US"/>
@@ -1067,10 +1147,51 @@
             <p:ph idx="1"/>
           </p:nvPr>
         </p:nvSpPr>
-        <p:spPr/>
-        <p:txBody>
-          <a:bodyPr/>
-          <a:lstStyle/>
+        <p:spPr>
+          <a:xfrm>
+            <a:off x="361315" y="264795"/>
+            <a:ext cx="11173460" cy="4884420"/>
+          </a:xfrm>
+        </p:spPr>
+        <p:txBody>
+          <a:bodyPr/>
+          <a:lstStyle>
+            <a:lvl1pPr marL="0" indent="0" algn="ctr">
+              <a:buNone/>
+              <a:defRPr>
+                <a:latin typeface="Times New Roman Regular" panose="02020603050405020304" charset="0"/>
+                <a:cs typeface="Times New Roman Regular" panose="02020603050405020304" charset="0"/>
+              </a:defRPr>
+            </a:lvl1pPr>
+            <a:lvl2pPr marL="457200" indent="0" algn="ctr">
+              <a:buNone/>
+              <a:defRPr>
+                <a:latin typeface="Times New Roman Regular" panose="02020603050405020304" charset="0"/>
+                <a:cs typeface="Times New Roman Regular" panose="02020603050405020304" charset="0"/>
+              </a:defRPr>
+            </a:lvl2pPr>
+            <a:lvl3pPr marL="914400" indent="0" algn="ctr">
+              <a:buNone/>
+              <a:defRPr>
+                <a:latin typeface="Times New Roman Regular" panose="02020603050405020304" charset="0"/>
+                <a:cs typeface="Times New Roman Regular" panose="02020603050405020304" charset="0"/>
+              </a:defRPr>
+            </a:lvl3pPr>
+            <a:lvl4pPr marL="1371600" indent="0" algn="ctr">
+              <a:buNone/>
+              <a:defRPr>
+                <a:latin typeface="Times New Roman Regular" panose="02020603050405020304" charset="0"/>
+                <a:cs typeface="Times New Roman Regular" panose="02020603050405020304" charset="0"/>
+              </a:defRPr>
+            </a:lvl4pPr>
+            <a:lvl5pPr marL="1828800" indent="0" algn="ctr">
+              <a:buNone/>
+              <a:defRPr>
+                <a:latin typeface="Times New Roman Regular" panose="02020603050405020304" charset="0"/>
+                <a:cs typeface="Times New Roman Regular" panose="02020603050405020304" charset="0"/>
+              </a:defRPr>
+            </a:lvl5pPr>
+          </a:lstStyle>
           <a:p>
             <a:pPr lvl="0"/>
             <a:r>
@@ -1123,7 +1244,12 @@
             <p:ph type="dt" sz="half" idx="10"/>
           </p:nvPr>
         </p:nvSpPr>
-        <p:spPr/>
+        <p:spPr>
+          <a:xfrm>
+            <a:off x="5133340" y="6422390"/>
+            <a:ext cx="2743200" cy="365125"/>
+          </a:xfrm>
+        </p:spPr>
         <p:txBody>
           <a:bodyPr/>
           <a:lstStyle/>
@@ -1145,10 +1271,23 @@
             <p:ph type="ftr" sz="quarter" idx="11"/>
           </p:nvPr>
         </p:nvSpPr>
-        <p:spPr/>
-        <p:txBody>
-          <a:bodyPr/>
-          <a:lstStyle/>
+        <p:spPr>
+          <a:xfrm>
+            <a:off x="560070" y="6422390"/>
+            <a:ext cx="4186555" cy="365125"/>
+          </a:xfrm>
+        </p:spPr>
+        <p:txBody>
+          <a:bodyPr/>
+          <a:lstStyle>
+            <a:lvl1pPr algn="l">
+              <a:defRPr>
+                <a:solidFill>
+                  <a:schemeClr val="bg1"/>
+                </a:solidFill>
+              </a:defRPr>
+            </a:lvl1pPr>
+          </a:lstStyle>
           <a:p>
             <a:r>
               <a:rPr lang="en-US"/>
@@ -2792,9 +2931,15 @@
 <p:sldMaster xmlns:a="http://schemas.openxmlformats.org/drawingml/2006/main" xmlns:r="http://schemas.openxmlformats.org/officeDocument/2006/relationships" xmlns:p="http://schemas.openxmlformats.org/presentationml/2006/main">
   <p:cSld>
     <p:bg>
-      <p:bgRef idx="1001">
-        <a:schemeClr val="bg1"/>
-      </p:bgRef>
+      <p:bgPr>
+        <a:blipFill rotWithShape="1">
+          <a:blip r:embed="rId12"/>
+          <a:stretch>
+            <a:fillRect/>
+          </a:stretch>
+        </a:blipFill>
+        <a:effectLst/>
+      </p:bgPr>
     </p:bg>
     <p:spTree>
       <p:nvGrpSpPr>
@@ -3360,45 +3505,6 @@
       </p:grpSpPr>
       <p:sp>
         <p:nvSpPr>
-          <p:cNvPr id="4" name="Content Placeholder 3"/>
-          <p:cNvSpPr>
-            <a:spLocks noGrp="1"/>
-          </p:cNvSpPr>
-          <p:nvPr>
-            <p:ph idx="1"/>
-          </p:nvPr>
-        </p:nvSpPr>
-        <p:spPr>
-          <a:xfrm>
-            <a:off x="838200" y="219075"/>
-            <a:ext cx="10515600" cy="5697220"/>
-          </a:xfrm>
-        </p:spPr>
-        <p:txBody>
-          <a:bodyPr anchor="t" anchorCtr="0"/>
-          <a:lstStyle/>
-          <a:p>
-            <a:pPr marL="0" indent="0" algn="ctr">
-              <a:buNone/>
-            </a:pPr>
-            <a:r>
-              <a:rPr lang="en-US" dirty="0">
-                <a:latin typeface="Times New Roman Regular" panose="02020603050405020304" charset="0"/>
-                <a:cs typeface="Times New Roman Regular" panose="02020603050405020304" charset="0"/>
-                <a:sym typeface="+mn-ea"/>
-              </a:rPr>
-              <a:t>[LYRICS AND CHORDS]</a:t>
-            </a:r>
-            <a:endParaRPr lang="en-US" dirty="0">
-              <a:latin typeface="Times New Roman Regular" panose="02020603050405020304" charset="0"/>
-              <a:cs typeface="Times New Roman Regular" panose="02020603050405020304" charset="0"/>
-              <a:sym typeface="+mn-ea"/>
-            </a:endParaRPr>
-          </a:p>
-        </p:txBody>
-      </p:sp>
-      <p:sp>
-        <p:nvSpPr>
           <p:cNvPr id="6" name="Title 5"/>
           <p:cNvSpPr>
             <a:spLocks noGrp="1"/>
@@ -3407,12 +3513,7 @@
             <p:ph type="title"/>
           </p:nvPr>
         </p:nvSpPr>
-        <p:spPr>
-          <a:xfrm>
-            <a:off x="588645" y="5981700"/>
-            <a:ext cx="10066020" cy="521970"/>
-          </a:xfrm>
-        </p:spPr>
+        <p:spPr/>
         <p:txBody>
           <a:bodyPr/>
           <a:lstStyle/>
@@ -3439,6 +3540,40 @@
       </p:sp>
       <p:sp>
         <p:nvSpPr>
+          <p:cNvPr id="4" name="Content Placeholder 3"/>
+          <p:cNvSpPr>
+            <a:spLocks noGrp="1"/>
+          </p:cNvSpPr>
+          <p:nvPr>
+            <p:ph idx="1"/>
+          </p:nvPr>
+        </p:nvSpPr>
+        <p:spPr/>
+        <p:txBody>
+          <a:bodyPr anchor="t" anchorCtr="0"/>
+          <a:lstStyle/>
+          <a:p>
+            <a:pPr marL="0" indent="0" algn="ctr">
+              <a:buNone/>
+            </a:pPr>
+            <a:r>
+              <a:rPr lang="en-US" dirty="0">
+                <a:latin typeface="Times New Roman Regular" panose="02020603050405020304" charset="0"/>
+                <a:cs typeface="Times New Roman Regular" panose="02020603050405020304" charset="0"/>
+                <a:sym typeface="+mn-ea"/>
+              </a:rPr>
+              <a:t>[LYRICS AND CHORDS]</a:t>
+            </a:r>
+            <a:endParaRPr lang="en-US" dirty="0">
+              <a:latin typeface="Times New Roman Regular" panose="02020603050405020304" charset="0"/>
+              <a:cs typeface="Times New Roman Regular" panose="02020603050405020304" charset="0"/>
+              <a:sym typeface="+mn-ea"/>
+            </a:endParaRPr>
+          </a:p>
+        </p:txBody>
+      </p:sp>
+      <p:sp>
+        <p:nvSpPr>
           <p:cNvPr id="9" name="Footer Placeholder 8"/>
           <p:cNvSpPr>
             <a:spLocks noGrp="1"/>
@@ -3447,12 +3582,7 @@
             <p:ph type="ftr" sz="quarter" idx="11"/>
           </p:nvPr>
         </p:nvSpPr>
-        <p:spPr>
-          <a:xfrm>
-            <a:off x="588728" y="6308780"/>
-            <a:ext cx="4114800" cy="365125"/>
-          </a:xfrm>
-        </p:spPr>
+        <p:spPr/>
         <p:txBody>
           <a:bodyPr/>
           <a:lstStyle/>

--- a/Song Template 4.pptx
+++ b/Song Template 4.pptx
@@ -1273,7 +1273,7 @@
         </p:nvSpPr>
         <p:spPr>
           <a:xfrm>
-            <a:off x="560070" y="6422390"/>
+            <a:off x="560070" y="6333490"/>
             <a:ext cx="4186555" cy="365125"/>
           </a:xfrm>
         </p:spPr>
@@ -1285,6 +1285,8 @@
                 <a:solidFill>
                   <a:schemeClr val="bg1"/>
                 </a:solidFill>
+                <a:latin typeface="Times New Roman Regular" panose="02020603050405020304" charset="0"/>
+                <a:cs typeface="Times New Roman Regular" panose="02020603050405020304" charset="0"/>
               </a:defRPr>
             </a:lvl1pPr>
           </a:lstStyle>

--- a/Song Template 4.pptx
+++ b/Song Template 4.pptx
@@ -3542,40 +3542,6 @@
       </p:sp>
       <p:sp>
         <p:nvSpPr>
-          <p:cNvPr id="4" name="Content Placeholder 3"/>
-          <p:cNvSpPr>
-            <a:spLocks noGrp="1"/>
-          </p:cNvSpPr>
-          <p:nvPr>
-            <p:ph idx="1"/>
-          </p:nvPr>
-        </p:nvSpPr>
-        <p:spPr/>
-        <p:txBody>
-          <a:bodyPr anchor="t" anchorCtr="0"/>
-          <a:lstStyle/>
-          <a:p>
-            <a:pPr marL="0" indent="0" algn="ctr">
-              <a:buNone/>
-            </a:pPr>
-            <a:r>
-              <a:rPr lang="en-US" dirty="0">
-                <a:latin typeface="Times New Roman Regular" panose="02020603050405020304" charset="0"/>
-                <a:cs typeface="Times New Roman Regular" panose="02020603050405020304" charset="0"/>
-                <a:sym typeface="+mn-ea"/>
-              </a:rPr>
-              <a:t>[LYRICS AND CHORDS]</a:t>
-            </a:r>
-            <a:endParaRPr lang="en-US" dirty="0">
-              <a:latin typeface="Times New Roman Regular" panose="02020603050405020304" charset="0"/>
-              <a:cs typeface="Times New Roman Regular" panose="02020603050405020304" charset="0"/>
-              <a:sym typeface="+mn-ea"/>
-            </a:endParaRPr>
-          </a:p>
-        </p:txBody>
-      </p:sp>
-      <p:sp>
-        <p:nvSpPr>
           <p:cNvPr id="9" name="Footer Placeholder 8"/>
           <p:cNvSpPr>
             <a:spLocks noGrp="1"/>
@@ -3610,6 +3576,320 @@
           </a:p>
         </p:txBody>
       </p:sp>
+      <p:graphicFrame>
+        <p:nvGraphicFramePr>
+          <p:cNvPr id="1025" name="LyricsTable"/>
+          <p:cNvGraphicFramePr/>
+          <p:nvPr/>
+        </p:nvGraphicFramePr>
+        <p:xfrm>
+          <a:off x="0" y="410845"/>
+          <a:ext cx="12192000" cy="4050030"/>
+        </p:xfrm>
+        <a:graphic>
+          <a:graphicData uri="http://schemas.openxmlformats.org/drawingml/2006/table">
+            <a:tbl>
+              <a:tblPr>
+                <a:tableStyleId>{5C22544A-7EE6-4342-B051-7303C2061113}</a:tableStyleId>
+              </a:tblPr>
+              <a:tblGrid>
+                <a:gridCol w="12192000"/>
+              </a:tblGrid>
+              <a:tr h="450000">
+                <a:tc>
+                  <a:txBody>
+                    <a:bodyPr/>
+                    <a:p>
+                      <a:pPr algn="ctr">
+                        <a:buNone/>
+                      </a:pPr>
+                      <a:r>
+                        <a:rPr lang="en-US" sz="2400">
+                          <a:latin typeface="Times New Roman Regular" panose="02020603050405020304"/>
+                          <a:cs typeface="Times New Roman Regular" panose="02020603050405020304"/>
+                        </a:rPr>
+                        <a:t>[LYRICS AND CHORDS]</a:t>
+                      </a:r>
+                      <a:endParaRPr lang="en-US" sz="2400">
+                        <a:latin typeface="Times New Roman Regular" panose="02020603050405020304"/>
+                        <a:cs typeface="Times New Roman Regular" panose="02020603050405020304"/>
+                      </a:endParaRPr>
+                    </a:p>
+                  </a:txBody>
+                  <a:tcPr marL="0" marR="0" marT="0" marB="0" vert="horz" anchor="ctr">
+                    <a:lnL w="0">
+                      <a:noFill/>
+                    </a:lnL>
+                    <a:lnR w="0">
+                      <a:noFill/>
+                    </a:lnR>
+                    <a:lnT w="0">
+                      <a:noFill/>
+                    </a:lnT>
+                    <a:lnB w="0">
+                      <a:noFill/>
+                    </a:lnB>
+                  </a:tcPr>
+                </a:tc>
+              </a:tr>
+              <a:tr h="450000">
+                <a:tc>
+                  <a:txBody>
+                    <a:bodyPr/>
+                    <a:p>
+                      <a:pPr algn="ctr">
+                        <a:buNone/>
+                      </a:pPr>
+                      <a:r>
+                        <a:rPr lang="en-US" sz="2040">
+                          <a:latin typeface="Courier New" panose="02070609020205020404"/>
+                          <a:cs typeface="Courier New" panose="02070609020205020404"/>
+                        </a:rPr>
+                        <a:t>                  </a:t>
+                      </a:r>
+                      <a:endParaRPr lang="en-US" sz="2040">
+                        <a:latin typeface="Courier New" panose="02070609020205020404"/>
+                        <a:cs typeface="Courier New" panose="02070609020205020404"/>
+                      </a:endParaRPr>
+                    </a:p>
+                  </a:txBody>
+                  <a:tcPr marL="0" marR="0" marT="0" marB="0" vert="horz" anchor="ctr">
+                    <a:lnL w="0">
+                      <a:noFill/>
+                    </a:lnL>
+                    <a:lnR w="0">
+                      <a:noFill/>
+                    </a:lnR>
+                    <a:lnT w="0">
+                      <a:noFill/>
+                    </a:lnT>
+                    <a:lnB w="0">
+                      <a:noFill/>
+                    </a:lnB>
+                  </a:tcPr>
+                </a:tc>
+              </a:tr>
+              <a:tr h="450000">
+                <a:tc>
+                  <a:txBody>
+                    <a:bodyPr/>
+                    <a:p>
+                      <a:pPr algn="ctr">
+                        <a:buNone/>
+                      </a:pPr>
+                      <a:endParaRPr lang="en-US" sz="2400">
+                        <a:latin typeface="Times New Roman Regular" panose="02020603050405020304"/>
+                        <a:cs typeface="Times New Roman Regular" panose="02020603050405020304"/>
+                      </a:endParaRPr>
+                    </a:p>
+                  </a:txBody>
+                  <a:tcPr marL="0" marR="0" marT="0" marB="0" vert="horz" anchor="ctr">
+                    <a:lnL w="0">
+                      <a:noFill/>
+                    </a:lnL>
+                    <a:lnR w="0">
+                      <a:noFill/>
+                    </a:lnR>
+                    <a:lnT w="0">
+                      <a:noFill/>
+                    </a:lnT>
+                    <a:lnB w="0">
+                      <a:noFill/>
+                    </a:lnB>
+                  </a:tcPr>
+                </a:tc>
+              </a:tr>
+              <a:tr h="450000">
+                <a:tc>
+                  <a:txBody>
+                    <a:bodyPr/>
+                    <a:p>
+                      <a:pPr algn="ctr">
+                        <a:buNone/>
+                      </a:pPr>
+                      <a:endParaRPr lang="en-US" sz="2040">
+                        <a:latin typeface="Courier New" panose="02070609020205020404"/>
+                        <a:cs typeface="Courier New" panose="02070609020205020404"/>
+                      </a:endParaRPr>
+                    </a:p>
+                  </a:txBody>
+                  <a:tcPr marL="0" marR="0" marT="0" marB="0" vert="horz" anchor="ctr">
+                    <a:lnL w="0">
+                      <a:noFill/>
+                    </a:lnL>
+                    <a:lnR w="0">
+                      <a:noFill/>
+                    </a:lnR>
+                    <a:lnT w="0">
+                      <a:noFill/>
+                    </a:lnT>
+                    <a:lnB w="0">
+                      <a:noFill/>
+                    </a:lnB>
+                  </a:tcPr>
+                </a:tc>
+              </a:tr>
+              <a:tr h="450000">
+                <a:tc>
+                  <a:txBody>
+                    <a:bodyPr/>
+                    <a:p>
+                      <a:pPr algn="ctr">
+                        <a:buNone/>
+                      </a:pPr>
+                      <a:r>
+                        <a:rPr lang="en-US" sz="2400">
+                          <a:latin typeface="Times New Roman Regular" panose="02020603050405020304"/>
+                          <a:cs typeface="Times New Roman Regular" panose="02020603050405020304"/>
+                        </a:rPr>
+                        <a:t> </a:t>
+                      </a:r>
+                      <a:endParaRPr lang="en-US" sz="2400">
+                        <a:latin typeface="Times New Roman Regular" panose="02020603050405020304"/>
+                        <a:cs typeface="Times New Roman Regular" panose="02020603050405020304"/>
+                      </a:endParaRPr>
+                    </a:p>
+                  </a:txBody>
+                  <a:tcPr marL="0" marR="0" marT="0" marB="0" vert="horz" anchor="ctr">
+                    <a:lnL w="0">
+                      <a:noFill/>
+                    </a:lnL>
+                    <a:lnR w="0">
+                      <a:noFill/>
+                    </a:lnR>
+                    <a:lnT w="0">
+                      <a:noFill/>
+                    </a:lnT>
+                    <a:lnB w="0">
+                      <a:noFill/>
+                    </a:lnB>
+                  </a:tcPr>
+                </a:tc>
+              </a:tr>
+              <a:tr h="450000">
+                <a:tc>
+                  <a:txBody>
+                    <a:bodyPr/>
+                    <a:p>
+                      <a:pPr algn="ctr">
+                        <a:buNone/>
+                      </a:pPr>
+                      <a:endParaRPr lang="en-US" sz="2040">
+                        <a:latin typeface="Courier New" panose="02070609020205020404"/>
+                        <a:cs typeface="Courier New" panose="02070609020205020404"/>
+                      </a:endParaRPr>
+                    </a:p>
+                  </a:txBody>
+                  <a:tcPr marL="0" marR="0" marT="0" marB="0" vert="horz" anchor="ctr">
+                    <a:lnL w="0">
+                      <a:noFill/>
+                    </a:lnL>
+                    <a:lnR w="0">
+                      <a:noFill/>
+                    </a:lnR>
+                    <a:lnT w="0">
+                      <a:noFill/>
+                    </a:lnT>
+                    <a:lnB w="0">
+                      <a:noFill/>
+                    </a:lnB>
+                  </a:tcPr>
+                </a:tc>
+              </a:tr>
+              <a:tr h="450000">
+                <a:tc>
+                  <a:txBody>
+                    <a:bodyPr/>
+                    <a:p>
+                      <a:pPr algn="ctr">
+                        <a:buNone/>
+                      </a:pPr>
+                      <a:endParaRPr lang="en-US" sz="2400">
+                        <a:latin typeface="Times New Roman Regular" panose="02020603050405020304"/>
+                        <a:cs typeface="Times New Roman Regular" panose="02020603050405020304"/>
+                      </a:endParaRPr>
+                    </a:p>
+                  </a:txBody>
+                  <a:tcPr marL="0" marR="0" marT="0" marB="0" vert="horz" anchor="ctr">
+                    <a:lnL w="0">
+                      <a:noFill/>
+                    </a:lnL>
+                    <a:lnR w="0">
+                      <a:noFill/>
+                    </a:lnR>
+                    <a:lnT w="0">
+                      <a:noFill/>
+                    </a:lnT>
+                    <a:lnB w="0">
+                      <a:noFill/>
+                    </a:lnB>
+                  </a:tcPr>
+                </a:tc>
+              </a:tr>
+              <a:tr h="450000">
+                <a:tc>
+                  <a:txBody>
+                    <a:bodyPr/>
+                    <a:p>
+                      <a:pPr algn="l">
+                        <a:buNone/>
+                      </a:pPr>
+                      <a:endParaRPr lang="en-US" sz="2400">
+                        <a:latin typeface="Courier New Regular" panose="02070609020205020404" charset="0"/>
+                        <a:cs typeface="Courier New Regular" panose="02070609020205020404" charset="0"/>
+                      </a:endParaRPr>
+                    </a:p>
+                  </a:txBody>
+                  <a:tcPr marL="0" marR="0" marT="0" marB="0" vert="horz" anchor="ctr">
+                    <a:lnL w="0">
+                      <a:noFill/>
+                    </a:lnL>
+                    <a:lnR w="0">
+                      <a:noFill/>
+                    </a:lnR>
+                    <a:lnT w="0">
+                      <a:noFill/>
+                    </a:lnT>
+                    <a:lnB w="0">
+                      <a:noFill/>
+                    </a:lnB>
+                  </a:tcPr>
+                </a:tc>
+              </a:tr>
+              <a:tr h="450000">
+                <a:tc>
+                  <a:txBody>
+                    <a:bodyPr/>
+                    <a:p>
+                      <a:pPr algn="ctr">
+                        <a:buNone/>
+                      </a:pPr>
+                      <a:endParaRPr lang="en-US" sz="2400">
+                        <a:latin typeface="Times New Roman Regular" panose="02020603050405020304" charset="0"/>
+                        <a:cs typeface="Times New Roman Regular" panose="02020603050405020304" charset="0"/>
+                      </a:endParaRPr>
+                    </a:p>
+                  </a:txBody>
+                  <a:tcPr marL="0" marR="0" marT="0" marB="0" vert="horz" anchor="ctr">
+                    <a:lnL w="0">
+                      <a:noFill/>
+                    </a:lnL>
+                    <a:lnR w="0">
+                      <a:noFill/>
+                    </a:lnR>
+                    <a:lnT w="0">
+                      <a:noFill/>
+                    </a:lnT>
+                    <a:lnB w="0">
+                      <a:noFill/>
+                    </a:lnB>
+                  </a:tcPr>
+                </a:tc>
+              </a:tr>
+            </a:tbl>
+          </a:graphicData>
+        </a:graphic>
+      </p:graphicFrame>
     </p:spTree>
     <p:custDataLst>
       <p:tags r:id="rId2"/>

--- a/Song Template 4.pptx
+++ b/Song Template 4.pptx
@@ -3542,6 +3542,30 @@
       </p:sp>
       <p:sp>
         <p:nvSpPr>
+          <p:cNvPr id="2" name="Content Placeholder 1"/>
+          <p:cNvSpPr>
+            <a:spLocks noGrp="1"/>
+          </p:cNvSpPr>
+          <p:nvPr>
+            <p:ph idx="1"/>
+          </p:nvPr>
+        </p:nvSpPr>
+        <p:spPr/>
+        <p:txBody>
+          <a:bodyPr/>
+          <a:p>
+            <a:r>
+              <a:rPr lang="en-US" dirty="0">
+                <a:sym typeface="+mn-ea"/>
+              </a:rPr>
+              <a:t>[LYRICS AND CHORDS]</a:t>
+            </a:r>
+            <a:endParaRPr lang="en-US"/>
+          </a:p>
+        </p:txBody>
+      </p:sp>
+      <p:sp>
+        <p:nvSpPr>
           <p:cNvPr id="9" name="Footer Placeholder 8"/>
           <p:cNvSpPr>
             <a:spLocks noGrp="1"/>
@@ -3576,320 +3600,6 @@
           </a:p>
         </p:txBody>
       </p:sp>
-      <p:graphicFrame>
-        <p:nvGraphicFramePr>
-          <p:cNvPr id="1025" name="LyricsTable"/>
-          <p:cNvGraphicFramePr/>
-          <p:nvPr/>
-        </p:nvGraphicFramePr>
-        <p:xfrm>
-          <a:off x="0" y="410845"/>
-          <a:ext cx="12192000" cy="4050030"/>
-        </p:xfrm>
-        <a:graphic>
-          <a:graphicData uri="http://schemas.openxmlformats.org/drawingml/2006/table">
-            <a:tbl>
-              <a:tblPr>
-                <a:tableStyleId>{5C22544A-7EE6-4342-B051-7303C2061113}</a:tableStyleId>
-              </a:tblPr>
-              <a:tblGrid>
-                <a:gridCol w="12192000"/>
-              </a:tblGrid>
-              <a:tr h="450000">
-                <a:tc>
-                  <a:txBody>
-                    <a:bodyPr/>
-                    <a:p>
-                      <a:pPr algn="ctr">
-                        <a:buNone/>
-                      </a:pPr>
-                      <a:r>
-                        <a:rPr lang="en-US" sz="2400">
-                          <a:latin typeface="Times New Roman Regular" panose="02020603050405020304"/>
-                          <a:cs typeface="Times New Roman Regular" panose="02020603050405020304"/>
-                        </a:rPr>
-                        <a:t>[LYRICS AND CHORDS]</a:t>
-                      </a:r>
-                      <a:endParaRPr lang="en-US" sz="2400">
-                        <a:latin typeface="Times New Roman Regular" panose="02020603050405020304"/>
-                        <a:cs typeface="Times New Roman Regular" panose="02020603050405020304"/>
-                      </a:endParaRPr>
-                    </a:p>
-                  </a:txBody>
-                  <a:tcPr marL="0" marR="0" marT="0" marB="0" vert="horz" anchor="ctr">
-                    <a:lnL w="0">
-                      <a:noFill/>
-                    </a:lnL>
-                    <a:lnR w="0">
-                      <a:noFill/>
-                    </a:lnR>
-                    <a:lnT w="0">
-                      <a:noFill/>
-                    </a:lnT>
-                    <a:lnB w="0">
-                      <a:noFill/>
-                    </a:lnB>
-                  </a:tcPr>
-                </a:tc>
-              </a:tr>
-              <a:tr h="450000">
-                <a:tc>
-                  <a:txBody>
-                    <a:bodyPr/>
-                    <a:p>
-                      <a:pPr algn="ctr">
-                        <a:buNone/>
-                      </a:pPr>
-                      <a:r>
-                        <a:rPr lang="en-US" sz="2040">
-                          <a:latin typeface="Courier New" panose="02070609020205020404"/>
-                          <a:cs typeface="Courier New" panose="02070609020205020404"/>
-                        </a:rPr>
-                        <a:t>                  </a:t>
-                      </a:r>
-                      <a:endParaRPr lang="en-US" sz="2040">
-                        <a:latin typeface="Courier New" panose="02070609020205020404"/>
-                        <a:cs typeface="Courier New" panose="02070609020205020404"/>
-                      </a:endParaRPr>
-                    </a:p>
-                  </a:txBody>
-                  <a:tcPr marL="0" marR="0" marT="0" marB="0" vert="horz" anchor="ctr">
-                    <a:lnL w="0">
-                      <a:noFill/>
-                    </a:lnL>
-                    <a:lnR w="0">
-                      <a:noFill/>
-                    </a:lnR>
-                    <a:lnT w="0">
-                      <a:noFill/>
-                    </a:lnT>
-                    <a:lnB w="0">
-                      <a:noFill/>
-                    </a:lnB>
-                  </a:tcPr>
-                </a:tc>
-              </a:tr>
-              <a:tr h="450000">
-                <a:tc>
-                  <a:txBody>
-                    <a:bodyPr/>
-                    <a:p>
-                      <a:pPr algn="ctr">
-                        <a:buNone/>
-                      </a:pPr>
-                      <a:endParaRPr lang="en-US" sz="2400">
-                        <a:latin typeface="Times New Roman Regular" panose="02020603050405020304"/>
-                        <a:cs typeface="Times New Roman Regular" panose="02020603050405020304"/>
-                      </a:endParaRPr>
-                    </a:p>
-                  </a:txBody>
-                  <a:tcPr marL="0" marR="0" marT="0" marB="0" vert="horz" anchor="ctr">
-                    <a:lnL w="0">
-                      <a:noFill/>
-                    </a:lnL>
-                    <a:lnR w="0">
-                      <a:noFill/>
-                    </a:lnR>
-                    <a:lnT w="0">
-                      <a:noFill/>
-                    </a:lnT>
-                    <a:lnB w="0">
-                      <a:noFill/>
-                    </a:lnB>
-                  </a:tcPr>
-                </a:tc>
-              </a:tr>
-              <a:tr h="450000">
-                <a:tc>
-                  <a:txBody>
-                    <a:bodyPr/>
-                    <a:p>
-                      <a:pPr algn="ctr">
-                        <a:buNone/>
-                      </a:pPr>
-                      <a:endParaRPr lang="en-US" sz="2040">
-                        <a:latin typeface="Courier New" panose="02070609020205020404"/>
-                        <a:cs typeface="Courier New" panose="02070609020205020404"/>
-                      </a:endParaRPr>
-                    </a:p>
-                  </a:txBody>
-                  <a:tcPr marL="0" marR="0" marT="0" marB="0" vert="horz" anchor="ctr">
-                    <a:lnL w="0">
-                      <a:noFill/>
-                    </a:lnL>
-                    <a:lnR w="0">
-                      <a:noFill/>
-                    </a:lnR>
-                    <a:lnT w="0">
-                      <a:noFill/>
-                    </a:lnT>
-                    <a:lnB w="0">
-                      <a:noFill/>
-                    </a:lnB>
-                  </a:tcPr>
-                </a:tc>
-              </a:tr>
-              <a:tr h="450000">
-                <a:tc>
-                  <a:txBody>
-                    <a:bodyPr/>
-                    <a:p>
-                      <a:pPr algn="ctr">
-                        <a:buNone/>
-                      </a:pPr>
-                      <a:r>
-                        <a:rPr lang="en-US" sz="2400">
-                          <a:latin typeface="Times New Roman Regular" panose="02020603050405020304"/>
-                          <a:cs typeface="Times New Roman Regular" panose="02020603050405020304"/>
-                        </a:rPr>
-                        <a:t> </a:t>
-                      </a:r>
-                      <a:endParaRPr lang="en-US" sz="2400">
-                        <a:latin typeface="Times New Roman Regular" panose="02020603050405020304"/>
-                        <a:cs typeface="Times New Roman Regular" panose="02020603050405020304"/>
-                      </a:endParaRPr>
-                    </a:p>
-                  </a:txBody>
-                  <a:tcPr marL="0" marR="0" marT="0" marB="0" vert="horz" anchor="ctr">
-                    <a:lnL w="0">
-                      <a:noFill/>
-                    </a:lnL>
-                    <a:lnR w="0">
-                      <a:noFill/>
-                    </a:lnR>
-                    <a:lnT w="0">
-                      <a:noFill/>
-                    </a:lnT>
-                    <a:lnB w="0">
-                      <a:noFill/>
-                    </a:lnB>
-                  </a:tcPr>
-                </a:tc>
-              </a:tr>
-              <a:tr h="450000">
-                <a:tc>
-                  <a:txBody>
-                    <a:bodyPr/>
-                    <a:p>
-                      <a:pPr algn="ctr">
-                        <a:buNone/>
-                      </a:pPr>
-                      <a:endParaRPr lang="en-US" sz="2040">
-                        <a:latin typeface="Courier New" panose="02070609020205020404"/>
-                        <a:cs typeface="Courier New" panose="02070609020205020404"/>
-                      </a:endParaRPr>
-                    </a:p>
-                  </a:txBody>
-                  <a:tcPr marL="0" marR="0" marT="0" marB="0" vert="horz" anchor="ctr">
-                    <a:lnL w="0">
-                      <a:noFill/>
-                    </a:lnL>
-                    <a:lnR w="0">
-                      <a:noFill/>
-                    </a:lnR>
-                    <a:lnT w="0">
-                      <a:noFill/>
-                    </a:lnT>
-                    <a:lnB w="0">
-                      <a:noFill/>
-                    </a:lnB>
-                  </a:tcPr>
-                </a:tc>
-              </a:tr>
-              <a:tr h="450000">
-                <a:tc>
-                  <a:txBody>
-                    <a:bodyPr/>
-                    <a:p>
-                      <a:pPr algn="ctr">
-                        <a:buNone/>
-                      </a:pPr>
-                      <a:endParaRPr lang="en-US" sz="2400">
-                        <a:latin typeface="Times New Roman Regular" panose="02020603050405020304"/>
-                        <a:cs typeface="Times New Roman Regular" panose="02020603050405020304"/>
-                      </a:endParaRPr>
-                    </a:p>
-                  </a:txBody>
-                  <a:tcPr marL="0" marR="0" marT="0" marB="0" vert="horz" anchor="ctr">
-                    <a:lnL w="0">
-                      <a:noFill/>
-                    </a:lnL>
-                    <a:lnR w="0">
-                      <a:noFill/>
-                    </a:lnR>
-                    <a:lnT w="0">
-                      <a:noFill/>
-                    </a:lnT>
-                    <a:lnB w="0">
-                      <a:noFill/>
-                    </a:lnB>
-                  </a:tcPr>
-                </a:tc>
-              </a:tr>
-              <a:tr h="450000">
-                <a:tc>
-                  <a:txBody>
-                    <a:bodyPr/>
-                    <a:p>
-                      <a:pPr algn="l">
-                        <a:buNone/>
-                      </a:pPr>
-                      <a:endParaRPr lang="en-US" sz="2400">
-                        <a:latin typeface="Courier New Regular" panose="02070609020205020404" charset="0"/>
-                        <a:cs typeface="Courier New Regular" panose="02070609020205020404" charset="0"/>
-                      </a:endParaRPr>
-                    </a:p>
-                  </a:txBody>
-                  <a:tcPr marL="0" marR="0" marT="0" marB="0" vert="horz" anchor="ctr">
-                    <a:lnL w="0">
-                      <a:noFill/>
-                    </a:lnL>
-                    <a:lnR w="0">
-                      <a:noFill/>
-                    </a:lnR>
-                    <a:lnT w="0">
-                      <a:noFill/>
-                    </a:lnT>
-                    <a:lnB w="0">
-                      <a:noFill/>
-                    </a:lnB>
-                  </a:tcPr>
-                </a:tc>
-              </a:tr>
-              <a:tr h="450000">
-                <a:tc>
-                  <a:txBody>
-                    <a:bodyPr/>
-                    <a:p>
-                      <a:pPr algn="ctr">
-                        <a:buNone/>
-                      </a:pPr>
-                      <a:endParaRPr lang="en-US" sz="2400">
-                        <a:latin typeface="Times New Roman Regular" panose="02020603050405020304" charset="0"/>
-                        <a:cs typeface="Times New Roman Regular" panose="02020603050405020304" charset="0"/>
-                      </a:endParaRPr>
-                    </a:p>
-                  </a:txBody>
-                  <a:tcPr marL="0" marR="0" marT="0" marB="0" vert="horz" anchor="ctr">
-                    <a:lnL w="0">
-                      <a:noFill/>
-                    </a:lnL>
-                    <a:lnR w="0">
-                      <a:noFill/>
-                    </a:lnR>
-                    <a:lnT w="0">
-                      <a:noFill/>
-                    </a:lnT>
-                    <a:lnB w="0">
-                      <a:noFill/>
-                    </a:lnB>
-                  </a:tcPr>
-                </a:tc>
-              </a:tr>
-            </a:tbl>
-          </a:graphicData>
-        </a:graphic>
-      </p:graphicFrame>
     </p:spTree>
     <p:custDataLst>
       <p:tags r:id="rId2"/>

--- a/Song Template 4.pptx
+++ b/Song Template 4.pptx
@@ -3550,9 +3550,14 @@
             <p:ph idx="1"/>
           </p:nvPr>
         </p:nvSpPr>
-        <p:spPr/>
-        <p:txBody>
-          <a:bodyPr/>
+        <p:spPr>
+          <a:xfrm>
+            <a:off x="560070" y="264795"/>
+            <a:ext cx="10974705" cy="4884420"/>
+          </a:xfrm>
+        </p:spPr>
+        <p:txBody>
+          <a:bodyPr anchor="ctr" anchorCtr="0"/>
           <a:p>
             <a:r>
               <a:rPr lang="en-US" dirty="0">

--- a/Song Template 4.pptx
+++ b/Song Template 4.pptx
@@ -5,10 +5,10 @@
     <p:sldMasterId id="2147483648" r:id="rId1"/>
   </p:sldMasterIdLst>
   <p:notesMasterIdLst>
-    <p:notesMasterId r:id="rId4"/>
+    <p:notesMasterId r:id="rId3"/>
   </p:notesMasterIdLst>
   <p:sldIdLst>
-    <p:sldId id="5001" r:id="rId3"/>
+    <p:sldId id="5001" r:id="rId2"/>
   </p:sldIdLst>
   <p:sldSz cx="12192000" cy="6858000"/>
   <p:notesSz cx="6858000" cy="9144000"/>
@@ -208,6 +208,7 @@
           <a:p>
             <a:fld id="{3EFD42F7-718C-4B98-AAEC-167E6DDD60A7}" type="datetimeFigureOut">
               <a:rPr lang="en-US" smtClean="0"/>
+              <a:t>4/22/26</a:t>
             </a:fld>
             <a:endParaRPr lang="en-US"/>
           </a:p>
@@ -274,7 +275,6 @@
               <a:rPr lang="en-US"/>
               <a:t>Click to edit Master text styles</a:t>
             </a:r>
-            <a:endParaRPr lang="en-US"/>
           </a:p>
           <a:p>
             <a:pPr lvl="1"/>
@@ -282,7 +282,6 @@
               <a:rPr lang="en-US"/>
               <a:t>Second level</a:t>
             </a:r>
-            <a:endParaRPr lang="en-US"/>
           </a:p>
           <a:p>
             <a:pPr lvl="2"/>
@@ -290,7 +289,6 @@
               <a:rPr lang="en-US"/>
               <a:t>Third level</a:t>
             </a:r>
-            <a:endParaRPr lang="en-US"/>
           </a:p>
           <a:p>
             <a:pPr lvl="3"/>
@@ -298,7 +296,6 @@
               <a:rPr lang="en-US"/>
               <a:t>Fourth level</a:t>
             </a:r>
-            <a:endParaRPr lang="en-US"/>
           </a:p>
           <a:p>
             <a:pPr lvl="4"/>
@@ -306,7 +303,6 @@
               <a:rPr lang="en-US"/>
               <a:t>Fifth level</a:t>
             </a:r>
-            <a:endParaRPr lang="en-US"/>
           </a:p>
         </p:txBody>
       </p:sp>
@@ -370,6 +366,7 @@
           <a:p>
             <a:fld id="{21B2AA4F-B828-4D7C-AFD3-893933DAFCB4}" type="slidenum">
               <a:rPr lang="en-US" smtClean="0"/>
+              <a:t>‹#›</a:t>
             </a:fld>
             <a:endParaRPr lang="en-US"/>
           </a:p>
@@ -482,12 +479,19 @@
         <p:cNvGrpSpPr/>
         <p:nvPr/>
       </p:nvGrpSpPr>
-      <p:grpSpPr/>
+      <p:grpSpPr>
+        <a:xfrm>
+          <a:off x="0" y="0"/>
+          <a:ext cx="0" cy="0"/>
+          <a:chOff x="0" y="0"/>
+          <a:chExt cx="0" cy="0"/>
+        </a:xfrm>
+      </p:grpSpPr>
       <p:sp>
         <p:nvSpPr>
           <p:cNvPr id="2" name="Slide Image Placeholder 1"/>
           <p:cNvSpPr>
-            <a:spLocks noGrp="1"/>
+            <a:spLocks noGrp="1" noRot="1" noChangeAspect="1"/>
           </p:cNvSpPr>
           <p:nvPr>
             <p:ph type="sldImg" idx="2"/>
@@ -508,12 +512,15 @@
         <p:spPr/>
         <p:txBody>
           <a:bodyPr/>
-          <a:p>
-            <a:r>
-              <a:rPr lang="en-US"/>
+          <a:lstStyle/>
+          <a:p>
+            <a:r>
+              <a:rPr lang="en-US" dirty="0">
+                <a:latin typeface="Courier New" panose="02070309020205020404" pitchFamily="49" charset="0"/>
+                <a:cs typeface="Courier New" panose="02070309020205020404" pitchFamily="49" charset="0"/>
+              </a:rPr>
               <a:t>[Presenter Note]</a:t>
             </a:r>
-            <a:endParaRPr lang="en-US"/>
           </a:p>
         </p:txBody>
       </p:sp>
@@ -570,7 +577,6 @@
               <a:rPr lang="en-US"/>
               <a:t>Click to edit Master title style</a:t>
             </a:r>
-            <a:endParaRPr lang="en-US"/>
           </a:p>
         </p:txBody>
       </p:sp>
@@ -635,7 +641,6 @@
               <a:rPr lang="en-US"/>
               <a:t>Click to edit Master subtitle style</a:t>
             </a:r>
-            <a:endParaRPr lang="en-US"/>
           </a:p>
         </p:txBody>
       </p:sp>
@@ -656,6 +661,7 @@
           <a:p>
             <a:fld id="{63A1C593-65D0-4073-BCC9-577B9352EA97}" type="datetimeFigureOut">
               <a:rPr lang="en-US" smtClean="0"/>
+              <a:t>4/22/26</a:t>
             </a:fld>
             <a:endParaRPr lang="en-US"/>
           </a:p>
@@ -680,7 +686,6 @@
               <a:rPr lang="en-US"/>
               <a:t>[Copyright Info]</a:t>
             </a:r>
-            <a:endParaRPr lang="en-US"/>
           </a:p>
         </p:txBody>
       </p:sp>
@@ -701,6 +706,7 @@
           <a:p>
             <a:fld id="{9B618960-8005-486C-9A75-10CB2AAC16F9}" type="slidenum">
               <a:rPr lang="en-US" smtClean="0"/>
+              <a:t>‹#›</a:t>
             </a:fld>
             <a:endParaRPr lang="en-US"/>
           </a:p>
@@ -751,7 +757,6 @@
               <a:rPr lang="en-US"/>
               <a:t>Click to edit Master title style</a:t>
             </a:r>
-            <a:endParaRPr lang="en-US"/>
           </a:p>
         </p:txBody>
       </p:sp>
@@ -775,7 +780,6 @@
               <a:rPr lang="en-US"/>
               <a:t>Click to edit Master text styles</a:t>
             </a:r>
-            <a:endParaRPr lang="en-US"/>
           </a:p>
           <a:p>
             <a:pPr lvl="1"/>
@@ -783,7 +787,6 @@
               <a:rPr lang="en-US"/>
               <a:t>Second level</a:t>
             </a:r>
-            <a:endParaRPr lang="en-US"/>
           </a:p>
           <a:p>
             <a:pPr lvl="2"/>
@@ -791,7 +794,6 @@
               <a:rPr lang="en-US"/>
               <a:t>Third level</a:t>
             </a:r>
-            <a:endParaRPr lang="en-US"/>
           </a:p>
           <a:p>
             <a:pPr lvl="3"/>
@@ -799,7 +801,6 @@
               <a:rPr lang="en-US"/>
               <a:t>Fourth level</a:t>
             </a:r>
-            <a:endParaRPr lang="en-US"/>
           </a:p>
           <a:p>
             <a:pPr lvl="4"/>
@@ -807,7 +808,6 @@
               <a:rPr lang="en-US"/>
               <a:t>Fifth level</a:t>
             </a:r>
-            <a:endParaRPr lang="en-US"/>
           </a:p>
         </p:txBody>
       </p:sp>
@@ -828,6 +828,7 @@
           <a:p>
             <a:fld id="{63A1C593-65D0-4073-BCC9-577B9352EA97}" type="datetimeFigureOut">
               <a:rPr lang="en-US" smtClean="0"/>
+              <a:t>4/22/26</a:t>
             </a:fld>
             <a:endParaRPr lang="en-US"/>
           </a:p>
@@ -852,7 +853,6 @@
               <a:rPr lang="en-US"/>
               <a:t>[Copyright Info]</a:t>
             </a:r>
-            <a:endParaRPr lang="en-US"/>
           </a:p>
         </p:txBody>
       </p:sp>
@@ -873,6 +873,7 @@
           <a:p>
             <a:fld id="{9B618960-8005-486C-9A75-10CB2AAC16F9}" type="slidenum">
               <a:rPr lang="en-US" smtClean="0"/>
+              <a:t>‹#›</a:t>
             </a:fld>
             <a:endParaRPr lang="en-US"/>
           </a:p>
@@ -928,7 +929,6 @@
               <a:rPr lang="en-US"/>
               <a:t>Click to edit Master title style</a:t>
             </a:r>
-            <a:endParaRPr lang="en-US"/>
           </a:p>
         </p:txBody>
       </p:sp>
@@ -957,7 +957,6 @@
               <a:rPr lang="en-US"/>
               <a:t>Click to edit Master text styles</a:t>
             </a:r>
-            <a:endParaRPr lang="en-US"/>
           </a:p>
           <a:p>
             <a:pPr lvl="1"/>
@@ -965,7 +964,6 @@
               <a:rPr lang="en-US"/>
               <a:t>Second level</a:t>
             </a:r>
-            <a:endParaRPr lang="en-US"/>
           </a:p>
           <a:p>
             <a:pPr lvl="2"/>
@@ -973,7 +971,6 @@
               <a:rPr lang="en-US"/>
               <a:t>Third level</a:t>
             </a:r>
-            <a:endParaRPr lang="en-US"/>
           </a:p>
           <a:p>
             <a:pPr lvl="3"/>
@@ -981,7 +978,6 @@
               <a:rPr lang="en-US"/>
               <a:t>Fourth level</a:t>
             </a:r>
-            <a:endParaRPr lang="en-US"/>
           </a:p>
           <a:p>
             <a:pPr lvl="4"/>
@@ -989,7 +985,6 @@
               <a:rPr lang="en-US"/>
               <a:t>Fifth level</a:t>
             </a:r>
-            <a:endParaRPr lang="en-US"/>
           </a:p>
         </p:txBody>
       </p:sp>
@@ -1010,6 +1005,7 @@
           <a:p>
             <a:fld id="{63A1C593-65D0-4073-BCC9-577B9352EA97}" type="datetimeFigureOut">
               <a:rPr lang="en-US" smtClean="0"/>
+              <a:t>4/22/26</a:t>
             </a:fld>
             <a:endParaRPr lang="en-US"/>
           </a:p>
@@ -1034,7 +1030,6 @@
               <a:rPr lang="en-US"/>
               <a:t>[Copyright Info]</a:t>
             </a:r>
-            <a:endParaRPr lang="en-US"/>
           </a:p>
         </p:txBody>
       </p:sp>
@@ -1055,6 +1050,7 @@
           <a:p>
             <a:fld id="{9B618960-8005-486C-9A75-10CB2AAC16F9}" type="slidenum">
               <a:rPr lang="en-US" smtClean="0"/>
+              <a:t>‹#›</a:t>
             </a:fld>
             <a:endParaRPr lang="en-US"/>
           </a:p>
@@ -1133,7 +1129,6 @@
               <a:rPr lang="en-US"/>
               <a:t>Click to edit Master title style</a:t>
             </a:r>
-            <a:endParaRPr lang="en-US"/>
           </a:p>
         </p:txBody>
       </p:sp>
@@ -1198,7 +1193,6 @@
               <a:rPr lang="en-US"/>
               <a:t>Click to edit Master text styles</a:t>
             </a:r>
-            <a:endParaRPr lang="en-US"/>
           </a:p>
           <a:p>
             <a:pPr lvl="1"/>
@@ -1206,7 +1200,6 @@
               <a:rPr lang="en-US"/>
               <a:t>Second level</a:t>
             </a:r>
-            <a:endParaRPr lang="en-US"/>
           </a:p>
           <a:p>
             <a:pPr lvl="2"/>
@@ -1214,7 +1207,6 @@
               <a:rPr lang="en-US"/>
               <a:t>Third level</a:t>
             </a:r>
-            <a:endParaRPr lang="en-US"/>
           </a:p>
           <a:p>
             <a:pPr lvl="3"/>
@@ -1222,7 +1214,6 @@
               <a:rPr lang="en-US"/>
               <a:t>Fourth level</a:t>
             </a:r>
-            <a:endParaRPr lang="en-US"/>
           </a:p>
           <a:p>
             <a:pPr lvl="4"/>
@@ -1230,7 +1221,6 @@
               <a:rPr lang="en-US"/>
               <a:t>Fifth level</a:t>
             </a:r>
-            <a:endParaRPr lang="en-US"/>
           </a:p>
         </p:txBody>
       </p:sp>
@@ -1256,6 +1246,7 @@
           <a:p>
             <a:fld id="{63A1C593-65D0-4073-BCC9-577B9352EA97}" type="datetimeFigureOut">
               <a:rPr lang="en-US" smtClean="0"/>
+              <a:t>4/22/26</a:t>
             </a:fld>
             <a:endParaRPr lang="en-US"/>
           </a:p>
@@ -1295,7 +1286,6 @@
               <a:rPr lang="en-US"/>
               <a:t>[Copyright Info]</a:t>
             </a:r>
-            <a:endParaRPr lang="en-US"/>
           </a:p>
         </p:txBody>
       </p:sp>
@@ -1316,6 +1306,7 @@
           <a:p>
             <a:fld id="{9B618960-8005-486C-9A75-10CB2AAC16F9}" type="slidenum">
               <a:rPr lang="en-US" smtClean="0"/>
+              <a:t>‹#›</a:t>
             </a:fld>
             <a:endParaRPr lang="en-US"/>
           </a:p>
@@ -1375,7 +1366,6 @@
               <a:rPr lang="en-US"/>
               <a:t>Click to edit Master title style</a:t>
             </a:r>
-            <a:endParaRPr lang="en-US"/>
           </a:p>
         </p:txBody>
       </p:sp>
@@ -1495,7 +1485,6 @@
               <a:rPr lang="en-US"/>
               <a:t>Click to edit Master text styles</a:t>
             </a:r>
-            <a:endParaRPr lang="en-US"/>
           </a:p>
         </p:txBody>
       </p:sp>
@@ -1516,6 +1505,7 @@
           <a:p>
             <a:fld id="{63A1C593-65D0-4073-BCC9-577B9352EA97}" type="datetimeFigureOut">
               <a:rPr lang="en-US" smtClean="0"/>
+              <a:t>4/22/26</a:t>
             </a:fld>
             <a:endParaRPr lang="en-US"/>
           </a:p>
@@ -1540,7 +1530,6 @@
               <a:rPr lang="en-US"/>
               <a:t>[Copyright Info]</a:t>
             </a:r>
-            <a:endParaRPr lang="en-US"/>
           </a:p>
         </p:txBody>
       </p:sp>
@@ -1561,6 +1550,7 @@
           <a:p>
             <a:fld id="{9B618960-8005-486C-9A75-10CB2AAC16F9}" type="slidenum">
               <a:rPr lang="en-US" smtClean="0"/>
+              <a:t>‹#›</a:t>
             </a:fld>
             <a:endParaRPr lang="en-US"/>
           </a:p>
@@ -1611,7 +1601,6 @@
               <a:rPr lang="en-US"/>
               <a:t>Click to edit Master title style</a:t>
             </a:r>
-            <a:endParaRPr lang="en-US"/>
           </a:p>
         </p:txBody>
       </p:sp>
@@ -1640,7 +1629,6 @@
               <a:rPr lang="en-US"/>
               <a:t>Click to edit Master text styles</a:t>
             </a:r>
-            <a:endParaRPr lang="en-US"/>
           </a:p>
           <a:p>
             <a:pPr lvl="1"/>
@@ -1648,7 +1636,6 @@
               <a:rPr lang="en-US"/>
               <a:t>Second level</a:t>
             </a:r>
-            <a:endParaRPr lang="en-US"/>
           </a:p>
           <a:p>
             <a:pPr lvl="2"/>
@@ -1656,7 +1643,6 @@
               <a:rPr lang="en-US"/>
               <a:t>Third level</a:t>
             </a:r>
-            <a:endParaRPr lang="en-US"/>
           </a:p>
           <a:p>
             <a:pPr lvl="3"/>
@@ -1664,7 +1650,6 @@
               <a:rPr lang="en-US"/>
               <a:t>Fourth level</a:t>
             </a:r>
-            <a:endParaRPr lang="en-US"/>
           </a:p>
           <a:p>
             <a:pPr lvl="4"/>
@@ -1672,7 +1657,6 @@
               <a:rPr lang="en-US"/>
               <a:t>Fifth level</a:t>
             </a:r>
-            <a:endParaRPr lang="en-US"/>
           </a:p>
         </p:txBody>
       </p:sp>
@@ -1701,7 +1685,6 @@
               <a:rPr lang="en-US"/>
               <a:t>Click to edit Master text styles</a:t>
             </a:r>
-            <a:endParaRPr lang="en-US"/>
           </a:p>
           <a:p>
             <a:pPr lvl="1"/>
@@ -1709,7 +1692,6 @@
               <a:rPr lang="en-US"/>
               <a:t>Second level</a:t>
             </a:r>
-            <a:endParaRPr lang="en-US"/>
           </a:p>
           <a:p>
             <a:pPr lvl="2"/>
@@ -1717,7 +1699,6 @@
               <a:rPr lang="en-US"/>
               <a:t>Third level</a:t>
             </a:r>
-            <a:endParaRPr lang="en-US"/>
           </a:p>
           <a:p>
             <a:pPr lvl="3"/>
@@ -1725,7 +1706,6 @@
               <a:rPr lang="en-US"/>
               <a:t>Fourth level</a:t>
             </a:r>
-            <a:endParaRPr lang="en-US"/>
           </a:p>
           <a:p>
             <a:pPr lvl="4"/>
@@ -1733,7 +1713,6 @@
               <a:rPr lang="en-US"/>
               <a:t>Fifth level</a:t>
             </a:r>
-            <a:endParaRPr lang="en-US"/>
           </a:p>
         </p:txBody>
       </p:sp>
@@ -1754,6 +1733,7 @@
           <a:p>
             <a:fld id="{63A1C593-65D0-4073-BCC9-577B9352EA97}" type="datetimeFigureOut">
               <a:rPr lang="en-US" smtClean="0"/>
+              <a:t>4/22/26</a:t>
             </a:fld>
             <a:endParaRPr lang="en-US"/>
           </a:p>
@@ -1778,7 +1758,6 @@
               <a:rPr lang="en-US"/>
               <a:t>[Copyright Info]</a:t>
             </a:r>
-            <a:endParaRPr lang="en-US"/>
           </a:p>
         </p:txBody>
       </p:sp>
@@ -1799,6 +1778,7 @@
           <a:p>
             <a:fld id="{9B618960-8005-486C-9A75-10CB2AAC16F9}" type="slidenum">
               <a:rPr lang="en-US" smtClean="0"/>
+              <a:t>‹#›</a:t>
             </a:fld>
             <a:endParaRPr lang="en-US"/>
           </a:p>
@@ -1854,7 +1834,6 @@
               <a:rPr lang="en-US"/>
               <a:t>Click to edit Master title style</a:t>
             </a:r>
-            <a:endParaRPr lang="en-US"/>
           </a:p>
         </p:txBody>
       </p:sp>
@@ -1920,7 +1899,6 @@
               <a:rPr lang="en-US"/>
               <a:t>Click to edit Master text styles</a:t>
             </a:r>
-            <a:endParaRPr lang="en-US"/>
           </a:p>
         </p:txBody>
       </p:sp>
@@ -1949,7 +1927,6 @@
               <a:rPr lang="en-US"/>
               <a:t>Click to edit Master text styles</a:t>
             </a:r>
-            <a:endParaRPr lang="en-US"/>
           </a:p>
           <a:p>
             <a:pPr lvl="1"/>
@@ -1957,7 +1934,6 @@
               <a:rPr lang="en-US"/>
               <a:t>Second level</a:t>
             </a:r>
-            <a:endParaRPr lang="en-US"/>
           </a:p>
           <a:p>
             <a:pPr lvl="2"/>
@@ -1965,7 +1941,6 @@
               <a:rPr lang="en-US"/>
               <a:t>Third level</a:t>
             </a:r>
-            <a:endParaRPr lang="en-US"/>
           </a:p>
           <a:p>
             <a:pPr lvl="3"/>
@@ -1973,7 +1948,6 @@
               <a:rPr lang="en-US"/>
               <a:t>Fourth level</a:t>
             </a:r>
-            <a:endParaRPr lang="en-US"/>
           </a:p>
           <a:p>
             <a:pPr lvl="4"/>
@@ -1981,7 +1955,6 @@
               <a:rPr lang="en-US"/>
               <a:t>Fifth level</a:t>
             </a:r>
-            <a:endParaRPr lang="en-US"/>
           </a:p>
         </p:txBody>
       </p:sp>
@@ -2047,7 +2020,6 @@
               <a:rPr lang="en-US"/>
               <a:t>Click to edit Master text styles</a:t>
             </a:r>
-            <a:endParaRPr lang="en-US"/>
           </a:p>
         </p:txBody>
       </p:sp>
@@ -2076,7 +2048,6 @@
               <a:rPr lang="en-US"/>
               <a:t>Click to edit Master text styles</a:t>
             </a:r>
-            <a:endParaRPr lang="en-US"/>
           </a:p>
           <a:p>
             <a:pPr lvl="1"/>
@@ -2084,7 +2055,6 @@
               <a:rPr lang="en-US"/>
               <a:t>Second level</a:t>
             </a:r>
-            <a:endParaRPr lang="en-US"/>
           </a:p>
           <a:p>
             <a:pPr lvl="2"/>
@@ -2092,7 +2062,6 @@
               <a:rPr lang="en-US"/>
               <a:t>Third level</a:t>
             </a:r>
-            <a:endParaRPr lang="en-US"/>
           </a:p>
           <a:p>
             <a:pPr lvl="3"/>
@@ -2100,7 +2069,6 @@
               <a:rPr lang="en-US"/>
               <a:t>Fourth level</a:t>
             </a:r>
-            <a:endParaRPr lang="en-US"/>
           </a:p>
           <a:p>
             <a:pPr lvl="4"/>
@@ -2108,7 +2076,6 @@
               <a:rPr lang="en-US"/>
               <a:t>Fifth level</a:t>
             </a:r>
-            <a:endParaRPr lang="en-US"/>
           </a:p>
         </p:txBody>
       </p:sp>
@@ -2129,6 +2096,7 @@
           <a:p>
             <a:fld id="{63A1C593-65D0-4073-BCC9-577B9352EA97}" type="datetimeFigureOut">
               <a:rPr lang="en-US" smtClean="0"/>
+              <a:t>4/22/26</a:t>
             </a:fld>
             <a:endParaRPr lang="en-US"/>
           </a:p>
@@ -2153,7 +2121,6 @@
               <a:rPr lang="en-US"/>
               <a:t>[Copyright Info]</a:t>
             </a:r>
-            <a:endParaRPr lang="en-US"/>
           </a:p>
         </p:txBody>
       </p:sp>
@@ -2174,6 +2141,7 @@
           <a:p>
             <a:fld id="{9B618960-8005-486C-9A75-10CB2AAC16F9}" type="slidenum">
               <a:rPr lang="en-US" smtClean="0"/>
+              <a:t>‹#›</a:t>
             </a:fld>
             <a:endParaRPr lang="en-US"/>
           </a:p>
@@ -2224,7 +2192,6 @@
               <a:rPr lang="en-US"/>
               <a:t>Click to edit Master title style</a:t>
             </a:r>
-            <a:endParaRPr lang="en-US"/>
           </a:p>
         </p:txBody>
       </p:sp>
@@ -2245,6 +2212,7 @@
           <a:p>
             <a:fld id="{63A1C593-65D0-4073-BCC9-577B9352EA97}" type="datetimeFigureOut">
               <a:rPr lang="en-US" smtClean="0"/>
+              <a:t>4/22/26</a:t>
             </a:fld>
             <a:endParaRPr lang="en-US"/>
           </a:p>
@@ -2269,7 +2237,6 @@
               <a:rPr lang="en-US"/>
               <a:t>[Copyright Info]</a:t>
             </a:r>
-            <a:endParaRPr lang="en-US"/>
           </a:p>
         </p:txBody>
       </p:sp>
@@ -2290,6 +2257,7 @@
           <a:p>
             <a:fld id="{9B618960-8005-486C-9A75-10CB2AAC16F9}" type="slidenum">
               <a:rPr lang="en-US" smtClean="0"/>
+              <a:t>‹#›</a:t>
             </a:fld>
             <a:endParaRPr lang="en-US"/>
           </a:p>
@@ -2338,6 +2306,7 @@
           <a:p>
             <a:fld id="{63A1C593-65D0-4073-BCC9-577B9352EA97}" type="datetimeFigureOut">
               <a:rPr lang="en-US" smtClean="0"/>
+              <a:t>4/22/26</a:t>
             </a:fld>
             <a:endParaRPr lang="en-US"/>
           </a:p>
@@ -2362,7 +2331,6 @@
               <a:rPr lang="en-US"/>
               <a:t>[Copyright Info]</a:t>
             </a:r>
-            <a:endParaRPr lang="en-US"/>
           </a:p>
         </p:txBody>
       </p:sp>
@@ -2383,6 +2351,7 @@
           <a:p>
             <a:fld id="{9B618960-8005-486C-9A75-10CB2AAC16F9}" type="slidenum">
               <a:rPr lang="en-US" smtClean="0"/>
+              <a:t>‹#›</a:t>
             </a:fld>
             <a:endParaRPr lang="en-US"/>
           </a:p>
@@ -2442,7 +2411,6 @@
               <a:rPr lang="en-US"/>
               <a:t>Click to edit Master title style</a:t>
             </a:r>
-            <a:endParaRPr lang="en-US"/>
           </a:p>
         </p:txBody>
       </p:sp>
@@ -2499,7 +2467,6 @@
               <a:rPr lang="en-US"/>
               <a:t>Click to edit Master text styles</a:t>
             </a:r>
-            <a:endParaRPr lang="en-US"/>
           </a:p>
           <a:p>
             <a:pPr lvl="1"/>
@@ -2507,7 +2474,6 @@
               <a:rPr lang="en-US"/>
               <a:t>Second level</a:t>
             </a:r>
-            <a:endParaRPr lang="en-US"/>
           </a:p>
           <a:p>
             <a:pPr lvl="2"/>
@@ -2515,7 +2481,6 @@
               <a:rPr lang="en-US"/>
               <a:t>Third level</a:t>
             </a:r>
-            <a:endParaRPr lang="en-US"/>
           </a:p>
           <a:p>
             <a:pPr lvl="3"/>
@@ -2523,7 +2488,6 @@
               <a:rPr lang="en-US"/>
               <a:t>Fourth level</a:t>
             </a:r>
-            <a:endParaRPr lang="en-US"/>
           </a:p>
           <a:p>
             <a:pPr lvl="4"/>
@@ -2531,7 +2495,6 @@
               <a:rPr lang="en-US"/>
               <a:t>Fifth level</a:t>
             </a:r>
-            <a:endParaRPr lang="en-US"/>
           </a:p>
         </p:txBody>
       </p:sp>
@@ -2597,7 +2560,6 @@
               <a:rPr lang="en-US"/>
               <a:t>Click to edit Master text styles</a:t>
             </a:r>
-            <a:endParaRPr lang="en-US"/>
           </a:p>
         </p:txBody>
       </p:sp>
@@ -2618,6 +2580,7 @@
           <a:p>
             <a:fld id="{63A1C593-65D0-4073-BCC9-577B9352EA97}" type="datetimeFigureOut">
               <a:rPr lang="en-US" smtClean="0"/>
+              <a:t>4/22/26</a:t>
             </a:fld>
             <a:endParaRPr lang="en-US"/>
           </a:p>
@@ -2642,7 +2605,6 @@
               <a:rPr lang="en-US"/>
               <a:t>[Copyright Info]</a:t>
             </a:r>
-            <a:endParaRPr lang="en-US"/>
           </a:p>
         </p:txBody>
       </p:sp>
@@ -2663,6 +2625,7 @@
           <a:p>
             <a:fld id="{9B618960-8005-486C-9A75-10CB2AAC16F9}" type="slidenum">
               <a:rPr lang="en-US" smtClean="0"/>
+              <a:t>‹#›</a:t>
             </a:fld>
             <a:endParaRPr lang="en-US"/>
           </a:p>
@@ -2722,7 +2685,6 @@
               <a:rPr lang="en-US"/>
               <a:t>Click to edit Master title style</a:t>
             </a:r>
-            <a:endParaRPr lang="en-US"/>
           </a:p>
         </p:txBody>
       </p:sp>
@@ -2849,7 +2811,6 @@
               <a:rPr lang="en-US"/>
               <a:t>Click to edit Master text styles</a:t>
             </a:r>
-            <a:endParaRPr lang="en-US"/>
           </a:p>
         </p:txBody>
       </p:sp>
@@ -2870,6 +2831,7 @@
           <a:p>
             <a:fld id="{63A1C593-65D0-4073-BCC9-577B9352EA97}" type="datetimeFigureOut">
               <a:rPr lang="en-US" smtClean="0"/>
+              <a:t>4/22/26</a:t>
             </a:fld>
             <a:endParaRPr lang="en-US"/>
           </a:p>
@@ -2894,7 +2856,6 @@
               <a:rPr lang="en-US"/>
               <a:t>[Copyright Info]</a:t>
             </a:r>
-            <a:endParaRPr lang="en-US"/>
           </a:p>
         </p:txBody>
       </p:sp>
@@ -2915,6 +2876,7 @@
           <a:p>
             <a:fld id="{9B618960-8005-486C-9A75-10CB2AAC16F9}" type="slidenum">
               <a:rPr lang="en-US" smtClean="0"/>
+              <a:t>‹#›</a:t>
             </a:fld>
             <a:endParaRPr lang="en-US"/>
           </a:p>
@@ -2935,7 +2897,7 @@
     <p:bg>
       <p:bgPr>
         <a:blipFill rotWithShape="1">
-          <a:blip r:embed="rId12"/>
+          <a:blip r:embed="rId13"/>
           <a:stretch>
             <a:fillRect/>
           </a:stretch>
@@ -2986,7 +2948,6 @@
               <a:rPr lang="en-US"/>
               <a:t>Click to edit Master title style</a:t>
             </a:r>
-            <a:endParaRPr lang="en-US"/>
           </a:p>
         </p:txBody>
       </p:sp>
@@ -3020,7 +2981,6 @@
               <a:rPr lang="en-US"/>
               <a:t>Click to edit Master text styles</a:t>
             </a:r>
-            <a:endParaRPr lang="en-US"/>
           </a:p>
           <a:p>
             <a:pPr lvl="1"/>
@@ -3028,7 +2988,6 @@
               <a:rPr lang="en-US"/>
               <a:t>Second level</a:t>
             </a:r>
-            <a:endParaRPr lang="en-US"/>
           </a:p>
           <a:p>
             <a:pPr lvl="2"/>
@@ -3036,7 +2995,6 @@
               <a:rPr lang="en-US"/>
               <a:t>Third level</a:t>
             </a:r>
-            <a:endParaRPr lang="en-US"/>
           </a:p>
           <a:p>
             <a:pPr lvl="3"/>
@@ -3044,7 +3002,6 @@
               <a:rPr lang="en-US"/>
               <a:t>Fourth level</a:t>
             </a:r>
-            <a:endParaRPr lang="en-US"/>
           </a:p>
           <a:p>
             <a:pPr lvl="4"/>
@@ -3052,7 +3009,6 @@
               <a:rPr lang="en-US"/>
               <a:t>Fifth level</a:t>
             </a:r>
-            <a:endParaRPr lang="en-US"/>
           </a:p>
         </p:txBody>
       </p:sp>
@@ -3091,6 +3047,7 @@
           <a:p>
             <a:fld id="{63A1C593-65D0-4073-BCC9-577B9352EA97}" type="datetimeFigureOut">
               <a:rPr lang="en-US" smtClean="0"/>
+              <a:t>4/22/26</a:t>
             </a:fld>
             <a:endParaRPr lang="en-US"/>
           </a:p>
@@ -3133,7 +3090,6 @@
               <a:rPr lang="en-US"/>
               <a:t>[Copyright Info]</a:t>
             </a:r>
-            <a:endParaRPr lang="en-US"/>
           </a:p>
         </p:txBody>
       </p:sp>
@@ -3172,6 +3128,7 @@
           <a:p>
             <a:fld id="{9B618960-8005-486C-9A75-10CB2AAC16F9}" type="slidenum">
               <a:rPr lang="en-US" smtClean="0"/>
+              <a:t>‹#›</a:t>
             </a:fld>
             <a:endParaRPr lang="en-US"/>
           </a:p>
@@ -3483,7 +3440,7 @@
     <p:bg>
       <p:bgPr>
         <a:blipFill>
-          <a:blip r:embed="rId1"/>
+          <a:blip r:embed="rId4"/>
           <a:stretch>
             <a:fillRect/>
           </a:stretch>
@@ -3530,13 +3487,6 @@
               </a:rPr>
               <a:t>[Title]</a:t>
             </a:r>
-            <a:endParaRPr lang="en-US" sz="2400" dirty="0">
-              <a:solidFill>
-                <a:schemeClr val="bg1"/>
-              </a:solidFill>
-              <a:latin typeface="Times New Roman Regular" panose="02020603050405020304" charset="0"/>
-              <a:cs typeface="Times New Roman Regular" panose="02020603050405020304" charset="0"/>
-            </a:endParaRPr>
           </a:p>
         </p:txBody>
       </p:sp>
@@ -3558,6 +3508,7 @@
         </p:spPr>
         <p:txBody>
           <a:bodyPr anchor="ctr" anchorCtr="0"/>
+          <a:lstStyle/>
           <a:p>
             <a:r>
               <a:rPr lang="en-US" dirty="0">
@@ -3595,19 +3546,12 @@
               </a:rPr>
               <a:t>[Copyright Info]</a:t>
             </a:r>
-            <a:endParaRPr lang="en-US" dirty="0">
-              <a:solidFill>
-                <a:schemeClr val="bg1"/>
-              </a:solidFill>
-              <a:latin typeface="Times New Roman Regular" panose="02020603050405020304" charset="0"/>
-              <a:cs typeface="Times New Roman Regular" panose="02020603050405020304" charset="0"/>
-            </a:endParaRPr>
           </a:p>
         </p:txBody>
       </p:sp>
     </p:spTree>
     <p:custDataLst>
-      <p:tags r:id="rId2"/>
+      <p:tags r:id="rId1"/>
     </p:custDataLst>
   </p:cSld>
   <p:clrMapOvr>
@@ -3617,7 +3561,7 @@
 </file>
 
 <file path=ppt/tags/tag1.xml><?xml version="1.0" encoding="utf-8"?>
-<p:tagLst xmlns:p="http://schemas.openxmlformats.org/presentationml/2006/main">
+<p:tagLst xmlns:a="http://schemas.openxmlformats.org/drawingml/2006/main" xmlns:r="http://schemas.openxmlformats.org/officeDocument/2006/relationships" xmlns:p="http://schemas.openxmlformats.org/presentationml/2006/main">
   <p:tag name="KSO_WM_SLIDE_TYPE" val="text"/>
   <p:tag name="KSO_WM_BEAUTIFY_FLAG" val="#wm#"/>
   <p:tag name="KSO_WM_SLIDE_THEME_ID" val="3312678"/>
@@ -3876,6 +3820,8 @@
       </a:bgFillStyleLst>
     </a:fmtScheme>
   </a:themeElements>
+  <a:objectDefaults/>
+  <a:extraClrSchemeLst/>
   <a:extLst>
     <a:ext uri="{05A4C25C-085E-4340-85A3-A5531E510DB2}">
       <thm15:themeFamily xmlns:thm15="http://schemas.microsoft.com/office/thememl/2012/main" name="Office Theme" id="{62F939B6-93AF-4DB8-9C6B-D6C7DFDC589F}" vid="{4A3C46E8-61CC-4603-A589-7422A47A8E4A}"/>
@@ -4135,6 +4081,8 @@
       </a:bgFillStyleLst>
     </a:fmtScheme>
   </a:themeElements>
+  <a:objectDefaults/>
+  <a:extraClrSchemeLst/>
   <a:extLst>
     <a:ext uri="{05A4C25C-085E-4340-85A3-A5531E510DB2}">
       <thm15:themeFamily xmlns:thm15="http://schemas.microsoft.com/office/thememl/2012/main" name="Office Theme" id="{62F939B6-93AF-4DB8-9C6B-D6C7DFDC589F}" vid="{4A3C46E8-61CC-4603-A589-7422A47A8E4A}"/>
